--- a/Curriculo/Fase2_Basico1/decks/Basico1_S04_Kiran.pptx
+++ b/Curriculo/Fase2_Basico1/decks/Basico1_S04_Kiran.pptx
@@ -133,7 +133,7 @@
   <p:extLst>
     <p:ext uri="{521415D9-36F7-43E2-AB2F-B90AF26B5E84}">
       <p14:sectionLst xmlns:p14="http://schemas.microsoft.com/office/powerpoint/2010/main">
-        <p14:section name="Semana 4" id="{2EAB967E-0E2D-6646-950C-FECC647A382D}">
+        <p14:section name="Semana 4" id="{1467274C-BA5A-E3D5-B9A9-FE5FE09B493E}">
           <p14:sldIdLst>
             <p14:sldId id="256"/>
             <p14:sldId id="257"/>
@@ -198,7 +198,7 @@
     </p:spTree>
     <p:extLst>
       <p:ext uri="{BB962C8B-B14F-4D97-AF65-F5344CB8AC3E}">
-        <p14:creationId xmlns:p14="http://schemas.microsoft.com/office/powerpoint/2010/main" val="89547497"/>
+        <p14:creationId xmlns:p14="http://schemas.microsoft.com/office/powerpoint/2010/main" val="3343387157"/>
       </p:ext>
     </p:extLst>
   </p:cSld>
@@ -345,7 +345,6 @@
             <a:r>
               <a:rPr lang="en-US" dirty="0"/>
               <a:t>20:00–20:01. Graba desde el minuto 0 (Basico1-Martes_S04_2026-11-03 / Basico1-Jueves_S04_2026-11-05) y comparte la pantalla. Saluda: «안녕하세요!» Recuerda que en EE.UU. cambió la hora el domingo 1 de noviembre (EE.UU. Este: 18:00). «¡Bienvenidos a la semana 4: estamos en la mitad del curso!»
-Imagen sugerida: Logo azul de Academia Seúl (portada de la casa)
 Fuente: S04 C.15 L1 · B 20:00 · C.2 · C.3 Bloque 0
 Lámina 1</a:t>
             </a:r>
@@ -613,7 +612,7 @@
             <a:r>
               <a:rPr lang="en-US" dirty="0"/>
               <a:t>20:13–20:14 (en el plan va antes de la L10). «Para señalar a alguien en la foto: con amigos o gente de tu edad, 이 사람. Con mayores, 이분, que es más respetuoso. ¿Y tu mamá? Ni una ni otra: la señalas y dices 우리 엄마예요! Decir 'esta persona' de tu propia mamá frente a la profe suena distante.» Con las 3 fotos: «이 사람은 카밀라예요. 친구예요. · 이분은 우리 할머니예요. · 우리 엄마예요!» Revisión nativa pendiente (D.1): también vas a oír 할머니세요 y 누구세요; en A1 se acepta 예요.
-Imagen sugerida: 3 fotos de banco de imágenes: una amiga joven · una abuela · una mamá
+Imagen: incluida (dibujo de la casa).
 Fuente: S04 C.15 L11 · C.3 paso 6 · C.4 §4 · A campo 7
 Lámina 11</a:t>
             </a:r>
@@ -1237,7 +1236,7 @@
             <a:r>
               <a:rPr lang="en-US" dirty="0"/>
               <a:t>20:30–20:31. Señalas un grupo: «몇 명이에요?» (solo reconocimiento: no se explica 몇). Cinco grupos, cinco alumnos distintos, por nombre; el clic muestra la respuesta. Si vas atrasada, esta lámina se salta y el «몇 명이에요?» pasa a las salas.
-Imagen sugerida: 5 grupos de siluetas azules o grises: ① 3 personas · ② 5 · ③ 1 · ④ 4 · ⑤ 2
+Imagen: incluida (dibujo de la casa).
 Fuente: S04 C.15 L18 · C.14 ¿Cuántos son? · C.3 paso 14 · C.12
 Lámina 18</a:t>
             </a:r>
@@ -1327,7 +1326,7 @@
             <a:r>
               <a:rPr lang="en-US" dirty="0"/>
               <a:t>20:01–20:05. «Quiz 3, como siempre: las cinco respuestas en un solo mensaje privado para mí, así: 1) ___ 2) ___ 3) ___ 4) ___ 5) ___. Escríbanlas, pero no aprieten Enter hasta que yo cuente.» Mientras escriben, carga las salas que armaste el día anterior (lector rápido + lector lento, según quizzes 1–2). «하나, 둘, 셋!» → envían (si el privado no funciona, a «Todos»). «하나, 둘, 셋 son números de hoy: ya los están usando.»
-Imagen sugerida: Dibujo: a la izquierda, Kiran con un libro en la mano; a la derecha, un alumno con una taza sobre su mesa; al fondo, lejos de los dos, un reloj en la pared. Flecha ① a la taza y flecha ② al reloj. Sin rojo (tampoco en las flechas).
+Imagen: incluida (dibujo de la casa).
 Fuente: S04 C.15 L2 · C.14 Quiz 3 · C.3 Bloque 0
 Lámina 2</a:t>
             </a:r>
@@ -1862,7 +1861,7 @@
             <a:r>
               <a:rPr lang="en-US" dirty="0"/>
               <a:t>Para C.11-B (2 min) o si el grupo no conoce Reply 1988 (con las mismas frases: 우리 아빠예요…). Adivinanzas: «우리 동생은 매기예요. 우리 오빠는 바트예요. 저는 누구예요?» (→ 리사예요!) · «우리 동생은 리사예요. 저는 누구예요?» (→ 바트예요!) · «우리 언니는 리사예요. 저는 누구예요?» (→ 매기예요!). Después, dos alumnos inventan una adivinanza con una familia famosa.
-Imagen sugerida: Dibujo o imagen de la familia Simpson con cada nombre en 한글
+Imagen pendiente: Dejar la lámina sin imagen: la familia Simpson tiene derechos (Disney / 20th Television), no existen imágenes con licencia libre y la tabla con los nombres en 한글 basta, porque todos la conocen. No dibujarla, ni pegar capturas, fan art o fotos de prensa en el deck.
 Fuente: S04 C.15 LB1 · C.11-B · C.12b
 Lámina LB1</a:t>
             </a:r>
@@ -1952,7 +1951,7 @@
             <a:r>
               <a:rPr lang="en-US" dirty="0"/>
               <a:t>Para quien no trajo foto o no quiere mostrarla: esta lámina, un dibujo de palitos con nombres hecho en 1 minuto o la foto de 덕선 (L5). Nunca le pidas explicación. Si la familia es un tema delicado para alguien (un duelo, una separación, una adopción), vale cualquier grupo (amigos, mascota, famosos), no preguntes por quién falta ni corrijas el número de personas; si algo pasa en la sala, cambia de tema con 이게 뭐예요?
-Imagen sugerida: Dibujo de palitos: una familia de 4 personas con un nombre sobre cada una (nombres por definir; azul o gris)
+Imagen: incluida (dibujo de la casa).
 Fuente: S04 C.15 LB2 · C.12b
 Lámina LB2</a:t>
             </a:r>
@@ -2309,7 +2308,7 @@
             <a:r>
               <a:rPr lang="en-US" dirty="0"/>
               <a:t>20:05–20:08 (con L6). «¿Alguien vio 응답하라 1988, Reply 1988? Les presento a 덕선 y a su familia.» Hablando como 덕선, con la mano en el pecho: «안녕하세요! 저는 덕선이에요. 우리 가족은 다섯 명이에요.» Señalando a cada uno, despacio: «우리 아빠예요. · 우리 엄마예요. · 우리 언니예요. · 우리 남동생이에요.» y «따라 하세요» → coro con cada uno. Si nadie conoce Reply 1988 o la imagen no carga, usa LB1 (familia Simpson).
-Imagen sugerida: Foto o dibujo de la familia de 덕선 (응답하라 1988 / Reply 1988) con 5 personas rotuladas: 아빠 · 엄마 · 언니 · 덕선 · 남동생. Imagen promocional oficial o árbol dibujado con los nombres si hay dudas de derechos (confirmar nombres: guía D.7).
+Imagen: incluida (dibujo de la casa).
 Fuente: S04 C.15 L5 · C.3 paso 2 · C.12b
 Lámina 5</a:t>
             </a:r>
@@ -2399,7 +2398,7 @@
             <a:r>
               <a:rPr lang="en-US" dirty="0"/>
               <a:t>Señalando a la mamá: «누구예요?» (→ «엄마예요!»); sigue con los demás en otro orden y el clic muestra la respuesta. «¿Qué significa 누구예요?» (→ ¿quién es?) «Exacto: 누구 es 'quién'. Y como 누구 termina en vocal, le sigue 예요.» Esta lámina vuelve a las 20:16–20:18 para la cadena: señalas, nombras a un alumno y responde como 덕선 («우리 언니예요.»), con 3 o 4 alumnos.
-Imagen sugerida: La misma imagen de L5 con flechas numeradas: 1 아빠 · 2 엄마 · 3 언니 · 4 남동생; respuestas por clic
+Imagen: incluida (dibujo de la casa).
 Fuente: S04 C.15 L6 · C.3 pasos 2 y 7 · Base: Sesion_04b_Personas_Familia.pptx §4B.6 (sin romanización)
 Lámina 6</a:t>
             </a:r>
@@ -2578,7 +2577,7 @@
             <a:r>
               <a:rPr lang="en-US" dirty="0"/>
               <a:t>20:09:30–20:11:30 (con 8b). «따라 하세요.» Una vez cada palabra y en coro: 가족 · 엄마 · 아빠 · 할머니 · 할아버지 · 언니 · 누나 · 오빠 · 형 · 동생 · 친구. Corrige en el momento solo tres cosas: 오빠/아빠 (tensas: «sin aire, la garganta apretada»), 형 («un soplo, no jota») y 언니 («boca abierta y relajada, no onni»). 할아버지 suena [하라버지]: se imita entera.
-Imagen sugerida: Árbol de familia con íconos azules o grises: 할아버지 · 할머니 · 아빠 · 엄마 · 언니/누나 · 오빠/형 · 나 (en el centro) · 동생 (남동생 · 여동생); aparte: 친구 · 강아지 · 고양이
+Imagen: incluida (dibujo de la casa).
 Fuente: S04 C.15 L8 (partida en 8a/8b por el límite de 8 tarjetas) · C.3 paso 4 · A.1 · C.6 · Base: Sesion_04b §4B.5
 Lámina 8a</a:t>
             </a:r>
@@ -3868,7 +3867,7 @@
         <p:spPr>
           <a:xfrm>
             <a:off x="548640" y="1325880"/>
-            <a:ext cx="11064240" cy="457200"/>
+            <a:ext cx="11091672" cy="457200"/>
           </a:xfrm>
           <a:prstGeom prst="rect">
             <a:avLst/>
@@ -3906,7 +3905,7 @@
           <p:nvPr>
             <p:extLst>
               <p:ext uri="{D42A27DB-BD31-4B8C-83A1-F6EECF244321}">
-                <p14:modId xmlns:p14="http://schemas.microsoft.com/office/powerpoint/2010/main" val="873637382"/>
+                <p14:modId xmlns:p14="http://schemas.microsoft.com/office/powerpoint/2010/main" val="1760797175"/>
               </p:ext>
             </p:extLst>
           </p:nvPr>
@@ -4846,7 +4845,7 @@
         <p:spPr>
           <a:xfrm>
             <a:off x="548640" y="1325880"/>
-            <a:ext cx="11064240" cy="548640"/>
+            <a:ext cx="11091672" cy="548640"/>
           </a:xfrm>
           <a:prstGeom prst="rect">
             <a:avLst/>
@@ -5044,7 +5043,7 @@
               <a:buNone/>
             </a:pPr>
             <a:r>
-              <a:rPr lang="ko-KR" altLang="en-US" sz="2400" dirty="0">
+              <a:rPr lang="ko-KR" altLang="en-US" sz="2300" dirty="0">
                 <a:solidFill>
                   <a:srgbClr val="14142B"/>
                 </a:solidFill>
@@ -5055,14 +5054,14 @@
               <a:t>마리아 </a:t>
             </a:r>
             <a:r>
-              <a:rPr lang="en-US" sz="2400" dirty="0">
+              <a:rPr lang="en-US" sz="2300" dirty="0">
                 <a:solidFill>
                   <a:srgbClr val="14142B"/>
                 </a:solidFill>
               </a:rPr>
               <a:t>habla de su hermano mayor</a:t>
             </a:r>
-            <a:endParaRPr lang="en-US" sz="2400" dirty="0"/>
+            <a:endParaRPr lang="en-US" sz="2300" dirty="0"/>
           </a:p>
         </p:txBody>
       </p:sp>
@@ -5224,7 +5223,7 @@
               <a:buNone/>
             </a:pPr>
             <a:r>
-              <a:rPr lang="ko-KR" altLang="en-US" sz="2400" dirty="0">
+              <a:rPr lang="ko-KR" altLang="en-US" sz="2300" dirty="0">
                 <a:solidFill>
                   <a:srgbClr val="14142B"/>
                 </a:solidFill>
@@ -5235,14 +5234,14 @@
               <a:t>다니엘 </a:t>
             </a:r>
             <a:r>
-              <a:rPr lang="en-US" sz="2400" dirty="0">
+              <a:rPr lang="en-US" sz="2300" dirty="0">
                 <a:solidFill>
                   <a:srgbClr val="14142B"/>
                 </a:solidFill>
               </a:rPr>
               <a:t>habla de su hermano mayor</a:t>
             </a:r>
-            <a:endParaRPr lang="en-US" sz="2400" dirty="0"/>
+            <a:endParaRPr lang="en-US" sz="2300" dirty="0"/>
           </a:p>
         </p:txBody>
       </p:sp>
@@ -5404,7 +5403,7 @@
               <a:buNone/>
             </a:pPr>
             <a:r>
-              <a:rPr lang="ko-KR" altLang="en-US" sz="2400" dirty="0">
+              <a:rPr lang="ko-KR" altLang="en-US" sz="2300" dirty="0">
                 <a:solidFill>
                   <a:srgbClr val="14142B"/>
                 </a:solidFill>
@@ -5415,14 +5414,14 @@
               <a:t>마리아 </a:t>
             </a:r>
             <a:r>
-              <a:rPr lang="en-US" sz="2400" dirty="0">
+              <a:rPr lang="en-US" sz="2300" dirty="0">
                 <a:solidFill>
                   <a:srgbClr val="14142B"/>
                 </a:solidFill>
               </a:rPr>
               <a:t>habla de su hermana mayor</a:t>
             </a:r>
-            <a:endParaRPr lang="en-US" sz="2400" dirty="0"/>
+            <a:endParaRPr lang="en-US" sz="2300" dirty="0"/>
           </a:p>
         </p:txBody>
       </p:sp>
@@ -5584,7 +5583,7 @@
               <a:buNone/>
             </a:pPr>
             <a:r>
-              <a:rPr lang="ko-KR" altLang="en-US" sz="2400" dirty="0">
+              <a:rPr lang="ko-KR" altLang="en-US" sz="2300" dirty="0">
                 <a:solidFill>
                   <a:srgbClr val="14142B"/>
                 </a:solidFill>
@@ -5595,14 +5594,14 @@
               <a:t>다니엘 </a:t>
             </a:r>
             <a:r>
-              <a:rPr lang="en-US" sz="2400" dirty="0">
+              <a:rPr lang="en-US" sz="2300" dirty="0">
                 <a:solidFill>
                   <a:srgbClr val="14142B"/>
                 </a:solidFill>
               </a:rPr>
               <a:t>habla de su hermana mayor</a:t>
             </a:r>
-            <a:endParaRPr lang="en-US" sz="2400" dirty="0"/>
+            <a:endParaRPr lang="en-US" sz="2300" dirty="0"/>
           </a:p>
         </p:txBody>
       </p:sp>
@@ -5764,7 +5763,7 @@
               <a:buNone/>
             </a:pPr>
             <a:r>
-              <a:rPr lang="ko-KR" altLang="en-US" sz="2400" dirty="0">
+              <a:rPr lang="ko-KR" altLang="en-US" sz="2300" dirty="0">
                 <a:solidFill>
                   <a:srgbClr val="14142B"/>
                 </a:solidFill>
@@ -5775,14 +5774,14 @@
               <a:t>다니엘 </a:t>
             </a:r>
             <a:r>
-              <a:rPr lang="en-US" sz="2400" dirty="0">
+              <a:rPr lang="en-US" sz="2300" dirty="0">
                 <a:solidFill>
                   <a:srgbClr val="14142B"/>
                 </a:solidFill>
               </a:rPr>
               <a:t>habla de su hermana menor</a:t>
             </a:r>
-            <a:endParaRPr lang="en-US" sz="2400" dirty="0"/>
+            <a:endParaRPr lang="en-US" sz="2300" dirty="0"/>
           </a:p>
         </p:txBody>
       </p:sp>
@@ -5971,7 +5970,7 @@
               <a:buNone/>
             </a:pPr>
             <a:r>
-              <a:rPr lang="ko-KR" altLang="en-US" sz="2400" dirty="0">
+              <a:rPr lang="ko-KR" altLang="en-US" sz="2300" dirty="0">
                 <a:solidFill>
                   <a:srgbClr val="14142B"/>
                 </a:solidFill>
@@ -5982,14 +5981,14 @@
               <a:t>마리아 </a:t>
             </a:r>
             <a:r>
-              <a:rPr lang="en-US" sz="2400" dirty="0">
+              <a:rPr lang="en-US" sz="2300" dirty="0">
                 <a:solidFill>
                   <a:srgbClr val="14142B"/>
                 </a:solidFill>
               </a:rPr>
               <a:t>habla de su hermano menor</a:t>
             </a:r>
-            <a:endParaRPr lang="en-US" sz="2400" dirty="0"/>
+            <a:endParaRPr lang="en-US" sz="2300" dirty="0"/>
           </a:p>
         </p:txBody>
       </p:sp>
@@ -6793,15 +6792,39 @@
           </a:p>
         </p:txBody>
       </p:sp>
-      <p:sp>
-        <p:nvSpPr>
-          <p:cNvPr id="5" name="Text 3"/>
+      <p:pic>
+        <p:nvPicPr>
+          <p:cNvPr id="5" name="col_img_0" descr="C:\Users\Chingu\AppData\Local\Temp\claude\C--Users-Chingu-Desktop-ACADEMIASEULWEB\d4111e1b-5523-44ea-97b2-b1a1d9545b9e\scratchpad\decks\cache\img_a5a5c25bcd47a0b3.png"/>
+          <p:cNvPicPr>
+            <a:picLocks noChangeAspect="1"/>
+          </p:cNvPicPr>
+          <p:nvPr/>
+        </p:nvPicPr>
+        <p:blipFill>
+          <a:blip r:embed="rId3"/>
+          <a:stretch>
+            <a:fillRect/>
+          </a:stretch>
+        </p:blipFill>
+        <p:spPr>
+          <a:xfrm>
+            <a:off x="777240" y="2103120"/>
+            <a:ext cx="3026664" cy="1375756"/>
+          </a:xfrm>
+          <a:prstGeom prst="rect">
+            <a:avLst/>
+          </a:prstGeom>
+        </p:spPr>
+      </p:pic>
+      <p:sp>
+        <p:nvSpPr>
+          <p:cNvPr id="6" name="Text 3"/>
           <p:cNvSpPr txBox="1"/>
           <p:nvPr/>
         </p:nvSpPr>
         <p:spPr>
           <a:xfrm>
-            <a:off x="777240" y="2103120"/>
+            <a:off x="777240" y="3570316"/>
             <a:ext cx="3026664" cy="914400"/>
           </a:xfrm>
           <a:prstGeom prst="rect">
@@ -6836,14 +6859,14 @@
       </p:sp>
       <p:sp>
         <p:nvSpPr>
-          <p:cNvPr id="6" name="lista"/>
+          <p:cNvPr id="7" name="lista"/>
           <p:cNvSpPr txBox="1"/>
           <p:nvPr/>
         </p:nvSpPr>
         <p:spPr>
           <a:xfrm>
-            <a:off x="731520" y="3108960"/>
-            <a:ext cx="3118104" cy="2926080"/>
+            <a:off x="731520" y="4576156"/>
+            <a:ext cx="3118104" cy="1458884"/>
           </a:xfrm>
           <a:prstGeom prst="rect">
             <a:avLst/>
@@ -6926,7 +6949,7 @@
       </p:sp>
       <p:sp>
         <p:nvSpPr>
-          <p:cNvPr id="7" name="col_1"/>
+          <p:cNvPr id="8" name="col_1"/>
           <p:cNvSpPr/>
           <p:nvPr/>
         </p:nvSpPr>
@@ -6953,7 +6976,7 @@
       </p:sp>
       <p:sp>
         <p:nvSpPr>
-          <p:cNvPr id="8" name="Text 6"/>
+          <p:cNvPr id="9" name="Text 6"/>
           <p:cNvSpPr txBox="1"/>
           <p:nvPr/>
         </p:nvSpPr>
@@ -6989,15 +7012,39 @@
           </a:p>
         </p:txBody>
       </p:sp>
-      <p:sp>
-        <p:nvSpPr>
-          <p:cNvPr id="9" name="Text 7"/>
+      <p:pic>
+        <p:nvPicPr>
+          <p:cNvPr id="10" name="col_img_1" descr="C:\Users\Chingu\AppData\Local\Temp\claude\C--Users-Chingu-Desktop-ACADEMIASEULWEB\d4111e1b-5523-44ea-97b2-b1a1d9545b9e\scratchpad\decks\cache\img_f51f6e2663ead31b.png"/>
+          <p:cNvPicPr>
+            <a:picLocks noChangeAspect="1"/>
+          </p:cNvPicPr>
+          <p:nvPr/>
+        </p:nvPicPr>
+        <p:blipFill>
+          <a:blip r:embed="rId4"/>
+          <a:stretch>
+            <a:fillRect/>
+          </a:stretch>
+        </p:blipFill>
+        <p:spPr>
+          <a:xfrm>
+            <a:off x="4581144" y="2103120"/>
+            <a:ext cx="3026664" cy="1375756"/>
+          </a:xfrm>
+          <a:prstGeom prst="rect">
+            <a:avLst/>
+          </a:prstGeom>
+        </p:spPr>
+      </p:pic>
+      <p:sp>
+        <p:nvSpPr>
+          <p:cNvPr id="11" name="Text 7"/>
           <p:cNvSpPr txBox="1"/>
           <p:nvPr/>
         </p:nvSpPr>
         <p:spPr>
           <a:xfrm>
-            <a:off x="4581144" y="2103120"/>
+            <a:off x="4581144" y="3570316"/>
             <a:ext cx="3026664" cy="914400"/>
           </a:xfrm>
           <a:prstGeom prst="rect">
@@ -7032,14 +7079,14 @@
       </p:sp>
       <p:sp>
         <p:nvSpPr>
-          <p:cNvPr id="10" name="lista"/>
+          <p:cNvPr id="12" name="lista"/>
           <p:cNvSpPr txBox="1"/>
           <p:nvPr/>
         </p:nvSpPr>
         <p:spPr>
           <a:xfrm>
-            <a:off x="4535424" y="3108960"/>
-            <a:ext cx="3118104" cy="2926080"/>
+            <a:off x="4535424" y="4576156"/>
+            <a:ext cx="3118104" cy="1458884"/>
           </a:xfrm>
           <a:prstGeom prst="rect">
             <a:avLst/>
@@ -7103,7 +7150,7 @@
       </p:sp>
       <p:sp>
         <p:nvSpPr>
-          <p:cNvPr id="11" name="col_2"/>
+          <p:cNvPr id="13" name="col_2"/>
           <p:cNvSpPr/>
           <p:nvPr/>
         </p:nvSpPr>
@@ -7130,7 +7177,7 @@
       </p:sp>
       <p:sp>
         <p:nvSpPr>
-          <p:cNvPr id="12" name="Text 10"/>
+          <p:cNvPr id="14" name="Text 10"/>
           <p:cNvSpPr txBox="1"/>
           <p:nvPr/>
         </p:nvSpPr>
@@ -7166,15 +7213,39 @@
           </a:p>
         </p:txBody>
       </p:sp>
-      <p:sp>
-        <p:nvSpPr>
-          <p:cNvPr id="13" name="Text 11"/>
+      <p:pic>
+        <p:nvPicPr>
+          <p:cNvPr id="15" name="col_img_2" descr="C:\Users\Chingu\AppData\Local\Temp\claude\C--Users-Chingu-Desktop-ACADEMIASEULWEB\d4111e1b-5523-44ea-97b2-b1a1d9545b9e\scratchpad\decks\cache\img_6cbb93cf86f87a3e.png"/>
+          <p:cNvPicPr>
+            <a:picLocks noChangeAspect="1"/>
+          </p:cNvPicPr>
+          <p:nvPr/>
+        </p:nvPicPr>
+        <p:blipFill>
+          <a:blip r:embed="rId5"/>
+          <a:stretch>
+            <a:fillRect/>
+          </a:stretch>
+        </p:blipFill>
+        <p:spPr>
+          <a:xfrm>
+            <a:off x="8385048" y="2103120"/>
+            <a:ext cx="3026664" cy="1375756"/>
+          </a:xfrm>
+          <a:prstGeom prst="rect">
+            <a:avLst/>
+          </a:prstGeom>
+        </p:spPr>
+      </p:pic>
+      <p:sp>
+        <p:nvSpPr>
+          <p:cNvPr id="16" name="Text 11"/>
           <p:cNvSpPr txBox="1"/>
           <p:nvPr/>
         </p:nvSpPr>
         <p:spPr>
           <a:xfrm>
-            <a:off x="8385048" y="2103120"/>
+            <a:off x="8385048" y="3570316"/>
             <a:ext cx="3026664" cy="914400"/>
           </a:xfrm>
           <a:prstGeom prst="rect">
@@ -7217,14 +7288,14 @@
       </p:sp>
       <p:sp>
         <p:nvSpPr>
-          <p:cNvPr id="14" name="lista"/>
+          <p:cNvPr id="17" name="lista"/>
           <p:cNvSpPr txBox="1"/>
           <p:nvPr/>
         </p:nvSpPr>
         <p:spPr>
           <a:xfrm>
-            <a:off x="8339328" y="3108960"/>
-            <a:ext cx="3118104" cy="2926080"/>
+            <a:off x="8339328" y="4576156"/>
+            <a:ext cx="3118104" cy="1458884"/>
           </a:xfrm>
           <a:prstGeom prst="rect">
             <a:avLst/>
@@ -7468,7 +7539,7 @@
         <p:spPr>
           <a:xfrm>
             <a:off x="548640" y="1325880"/>
-            <a:ext cx="11064240" cy="548640"/>
+            <a:ext cx="11091672" cy="548640"/>
           </a:xfrm>
           <a:prstGeom prst="rect">
             <a:avLst/>
@@ -9357,7 +9428,7 @@
         <p:spPr>
           <a:xfrm>
             <a:off x="548640" y="1325880"/>
-            <a:ext cx="11064240" cy="457200"/>
+            <a:ext cx="11091672" cy="457200"/>
           </a:xfrm>
           <a:prstGeom prst="rect">
             <a:avLst/>
@@ -10810,7 +10881,7 @@
         <p:spPr>
           <a:xfrm>
             <a:off x="548640" y="1325880"/>
-            <a:ext cx="11064240" cy="457200"/>
+            <a:ext cx="11091672" cy="457200"/>
           </a:xfrm>
           <a:prstGeom prst="rect">
             <a:avLst/>
@@ -10916,7 +10987,7 @@
           <p:nvPr>
             <p:extLst>
               <p:ext uri="{D42A27DB-BD31-4B8C-83A1-F6EECF244321}">
-                <p14:modId xmlns:p14="http://schemas.microsoft.com/office/powerpoint/2010/main" val="1898080924"/>
+                <p14:modId xmlns:p14="http://schemas.microsoft.com/office/powerpoint/2010/main" val="975104975"/>
               </p:ext>
             </p:extLst>
           </p:nvPr>
@@ -12869,7 +12940,7 @@
         <p:spPr>
           <a:xfrm>
             <a:off x="548640" y="1325880"/>
-            <a:ext cx="11064240" cy="457200"/>
+            <a:ext cx="11091672" cy="457200"/>
           </a:xfrm>
           <a:prstGeom prst="rect">
             <a:avLst/>
@@ -12918,7 +12989,7 @@
           <p:nvPr>
             <p:extLst>
               <p:ext uri="{D42A27DB-BD31-4B8C-83A1-F6EECF244321}">
-                <p14:modId xmlns:p14="http://schemas.microsoft.com/office/powerpoint/2010/main" val="1004691754"/>
+                <p14:modId xmlns:p14="http://schemas.microsoft.com/office/powerpoint/2010/main" val="861660501"/>
               </p:ext>
             </p:extLst>
           </p:nvPr>
@@ -14877,7 +14948,7 @@
         <p:spPr>
           <a:xfrm>
             <a:off x="548640" y="1325880"/>
-            <a:ext cx="11064240" cy="457200"/>
+            <a:ext cx="11091672" cy="457200"/>
           </a:xfrm>
           <a:prstGeom prst="rect">
             <a:avLst/>
@@ -14903,7 +14974,7 @@
                 <a:ea typeface="Malgun Gothic" pitchFamily="34" charset="-122"/>
                 <a:cs typeface="Malgun Gothic" pitchFamily="34" charset="-120"/>
               </a:rPr>
-              <a:t>우리 가족은 네 명이에요</a:t>
+              <a:t>우리 가족은 네 명이에요</a:t>
             </a:r>
             <a:r>
               <a:rPr lang="en-US" sz="1800" i="1" dirty="0">
@@ -14926,7 +14997,7 @@
           <p:nvPr>
             <p:extLst>
               <p:ext uri="{D42A27DB-BD31-4B8C-83A1-F6EECF244321}">
-                <p14:modId xmlns:p14="http://schemas.microsoft.com/office/powerpoint/2010/main" val="3360846143"/>
+                <p14:modId xmlns:p14="http://schemas.microsoft.com/office/powerpoint/2010/main" val="241210756"/>
               </p:ext>
             </p:extLst>
           </p:nvPr>
@@ -15177,7 +15248,7 @@
                           <a:ea typeface="Malgun Gothic" pitchFamily="34" charset="-122"/>
                           <a:cs typeface="Malgun Gothic" pitchFamily="34" charset="-120"/>
                         </a:rPr>
-                        <a:t>한 명</a:t>
+                        <a:t>한 명</a:t>
                       </a:r>
                       <a:endParaRPr lang="en-US" sz="1200" dirty="0"/>
                     </a:p>
@@ -15320,7 +15391,7 @@
                           <a:ea typeface="Malgun Gothic" pitchFamily="34" charset="-122"/>
                           <a:cs typeface="Malgun Gothic" pitchFamily="34" charset="-120"/>
                         </a:rPr>
-                        <a:t>두 명</a:t>
+                        <a:t>두 명</a:t>
                       </a:r>
                       <a:endParaRPr lang="en-US" sz="1200" dirty="0"/>
                     </a:p>
@@ -15463,7 +15534,7 @@
                           <a:ea typeface="Malgun Gothic" pitchFamily="34" charset="-122"/>
                           <a:cs typeface="Malgun Gothic" pitchFamily="34" charset="-120"/>
                         </a:rPr>
-                        <a:t>세 명</a:t>
+                        <a:t>세 명</a:t>
                       </a:r>
                       <a:endParaRPr lang="en-US" sz="1200" dirty="0"/>
                     </a:p>
@@ -15606,7 +15677,7 @@
                           <a:ea typeface="Malgun Gothic" pitchFamily="34" charset="-122"/>
                           <a:cs typeface="Malgun Gothic" pitchFamily="34" charset="-120"/>
                         </a:rPr>
-                        <a:t>네 명</a:t>
+                        <a:t>네 명</a:t>
                       </a:r>
                       <a:endParaRPr lang="en-US" sz="1200" dirty="0"/>
                     </a:p>
@@ -15749,7 +15820,7 @@
                           <a:ea typeface="Malgun Gothic" pitchFamily="34" charset="-122"/>
                           <a:cs typeface="Malgun Gothic" pitchFamily="34" charset="-120"/>
                         </a:rPr>
-                        <a:t>다섯 명 </a:t>
+                        <a:t>다섯 명 </a:t>
                       </a:r>
                       <a:r>
                         <a:rPr lang="en-US" sz="1800" dirty="0">
@@ -16141,7 +16212,7 @@
         <p:spPr>
           <a:xfrm>
             <a:off x="548640" y="1325880"/>
-            <a:ext cx="11064240" cy="548640"/>
+            <a:ext cx="11091672" cy="548640"/>
           </a:xfrm>
           <a:prstGeom prst="rect">
             <a:avLst/>
@@ -16183,14 +16254,72 @@
       </p:sp>
       <p:sp>
         <p:nvSpPr>
-          <p:cNvPr id="4" name="num_0"/>
+          <p:cNvPr id="4" name="card_0"/>
           <p:cNvSpPr/>
           <p:nvPr/>
         </p:nvSpPr>
         <p:spPr>
           <a:xfrm>
-            <a:off x="548640" y="2106778"/>
-            <a:ext cx="457200" cy="457200"/>
+            <a:off x="548640" y="1965960"/>
+            <a:ext cx="2072030" cy="4206240"/>
+          </a:xfrm>
+          <a:prstGeom prst="roundRect">
+            <a:avLst>
+              <a:gd name="adj" fmla="val 6620"/>
+            </a:avLst>
+          </a:prstGeom>
+          <a:solidFill>
+            <a:srgbClr val="FFFFFF"/>
+          </a:solidFill>
+          <a:ln w="12700">
+            <a:solidFill>
+              <a:srgbClr val="D9D7F7"/>
+            </a:solidFill>
+            <a:prstDash val="solid"/>
+          </a:ln>
+          <a:effectLst>
+            <a:outerShdw blurRad="76200" dist="25400" dir="5400000" algn="bl" rotWithShape="0">
+              <a:srgbClr val="14142B">
+                <a:alpha val="12000"/>
+              </a:srgbClr>
+            </a:outerShdw>
+          </a:effectLst>
+        </p:spPr>
+      </p:sp>
+      <p:pic>
+        <p:nvPicPr>
+          <p:cNvPr id="5" name="item_img_0" descr="C:\Users\Chingu\AppData\Local\Temp\claude\C--Users-Chingu-Desktop-ACADEMIASEULWEB\d4111e1b-5523-44ea-97b2-b1a1d9545b9e\scratchpad\decks\cache\img_60ecc31f161aa14d.png"/>
+          <p:cNvPicPr>
+            <a:picLocks noChangeAspect="1"/>
+          </p:cNvPicPr>
+          <p:nvPr/>
+        </p:nvPicPr>
+        <p:blipFill>
+          <a:blip r:embed="rId3"/>
+          <a:stretch>
+            <a:fillRect/>
+          </a:stretch>
+        </p:blipFill>
+        <p:spPr>
+          <a:xfrm>
+            <a:off x="658368" y="2388413"/>
+            <a:ext cx="1852574" cy="1852574"/>
+          </a:xfrm>
+          <a:prstGeom prst="rect">
+            <a:avLst/>
+          </a:prstGeom>
+        </p:spPr>
+      </p:pic>
+      <p:sp>
+        <p:nvSpPr>
+          <p:cNvPr id="6" name="num_0"/>
+          <p:cNvSpPr/>
+          <p:nvPr/>
+        </p:nvSpPr>
+        <p:spPr>
+          <a:xfrm>
+            <a:off x="640080" y="2057400"/>
+            <a:ext cx="420624" cy="420624"/>
           </a:xfrm>
           <a:prstGeom prst="ellipse">
             <a:avLst/>
@@ -16198,9 +16327,9 @@
           <a:solidFill>
             <a:srgbClr val="003478"/>
           </a:solidFill>
-          <a:ln w="12700">
+          <a:ln w="19050">
             <a:solidFill>
-              <a:srgbClr val="003478"/>
+              <a:srgbClr val="FFFFFF"/>
             </a:solidFill>
             <a:prstDash val="solid"/>
           </a:ln>
@@ -16208,14 +16337,14 @@
       </p:sp>
       <p:sp>
         <p:nvSpPr>
-          <p:cNvPr id="5" name="Text 3"/>
+          <p:cNvPr id="7" name="Text 4"/>
           <p:cNvSpPr txBox="1"/>
           <p:nvPr/>
         </p:nvSpPr>
         <p:spPr>
           <a:xfrm>
-            <a:off x="548640" y="2106778"/>
-            <a:ext cx="457200" cy="457200"/>
+            <a:off x="640080" y="2057400"/>
+            <a:ext cx="420624" cy="420624"/>
           </a:xfrm>
           <a:prstGeom prst="rect">
             <a:avLst/>
@@ -16233,27 +16362,27 @@
               <a:buNone/>
             </a:pPr>
             <a:r>
-              <a:rPr lang="en-US" sz="1600" b="1" dirty="0">
+              <a:rPr lang="en-US" sz="1500" b="1" dirty="0">
                 <a:solidFill>
                   <a:srgbClr val="FFFFFF"/>
                 </a:solidFill>
               </a:rPr>
               <a:t>1</a:t>
             </a:r>
-            <a:endParaRPr lang="en-US" sz="1600" dirty="0"/>
+            <a:endParaRPr lang="en-US" sz="1500" dirty="0"/>
           </a:p>
         </p:txBody>
       </p:sp>
       <p:sp>
         <p:nvSpPr>
-          <p:cNvPr id="6" name="Text 4"/>
+          <p:cNvPr id="8" name="Text 5"/>
           <p:cNvSpPr txBox="1"/>
           <p:nvPr/>
         </p:nvSpPr>
         <p:spPr>
           <a:xfrm>
-            <a:off x="1188720" y="1965960"/>
-            <a:ext cx="6080760" cy="738835"/>
+            <a:off x="640080" y="4617720"/>
+            <a:ext cx="1889150" cy="777240"/>
           </a:xfrm>
           <a:prstGeom prst="rect">
             <a:avLst/>
@@ -16267,35 +16396,35 @@
           </a:bodyPr>
           <a:lstStyle/>
           <a:p>
-            <a:pPr marL="0" indent="0" eaLnBrk="1">
+            <a:pPr marL="0" indent="0" algn="ctr" eaLnBrk="1">
               <a:buNone/>
             </a:pPr>
             <a:r>
-              <a:rPr lang="en-US" sz="2400" dirty="0">
+              <a:rPr lang="en-US" sz="2200" dirty="0">
                 <a:solidFill>
                   <a:srgbClr val="14142B"/>
                 </a:solidFill>
               </a:rPr>
               <a:t>Grupo ①</a:t>
             </a:r>
-            <a:endParaRPr lang="en-US" sz="2400" dirty="0"/>
+            <a:endParaRPr lang="en-US" sz="2200" dirty="0"/>
           </a:p>
         </p:txBody>
       </p:sp>
       <p:sp>
         <p:nvSpPr>
-          <p:cNvPr id="7" name="rev_21_caja"/>
+          <p:cNvPr id="9" name="rev_21_caja"/>
           <p:cNvSpPr/>
           <p:nvPr/>
         </p:nvSpPr>
         <p:spPr>
           <a:xfrm>
-            <a:off x="7498080" y="2002536"/>
-            <a:ext cx="4142232" cy="665683"/>
+            <a:off x="658368" y="5440680"/>
+            <a:ext cx="1852574" cy="640080"/>
           </a:xfrm>
           <a:prstGeom prst="roundRect">
             <a:avLst>
-              <a:gd name="adj" fmla="val 16484"/>
+              <a:gd name="adj" fmla="val 17143"/>
             </a:avLst>
           </a:prstGeom>
           <a:solidFill>
@@ -16311,14 +16440,14 @@
       </p:sp>
       <p:sp>
         <p:nvSpPr>
-          <p:cNvPr id="8" name="rev_21_txt"/>
+          <p:cNvPr id="10" name="rev_21_txt"/>
           <p:cNvSpPr txBox="1"/>
           <p:nvPr/>
         </p:nvSpPr>
         <p:spPr>
           <a:xfrm>
-            <a:off x="7589520" y="2002536"/>
-            <a:ext cx="3959352" cy="665683"/>
+            <a:off x="685800" y="5440680"/>
+            <a:ext cx="1797710" cy="640080"/>
           </a:xfrm>
           <a:prstGeom prst="rect">
             <a:avLst/>
@@ -16336,7 +16465,7 @@
               <a:buNone/>
             </a:pPr>
             <a:r>
-              <a:rPr lang="ko-KR" altLang="en-US" sz="2200" b="1" dirty="0">
+              <a:rPr lang="ko-KR" altLang="en-US" sz="1800" b="1" dirty="0">
                 <a:solidFill>
                   <a:srgbClr val="FFFFFF"/>
                 </a:solidFill>
@@ -16344,30 +16473,88 @@
                 <a:ea typeface="Malgun Gothic" pitchFamily="34" charset="-122"/>
                 <a:cs typeface="Malgun Gothic" pitchFamily="34" charset="-120"/>
               </a:rPr>
-              <a:t>세 명이에요</a:t>
-            </a:r>
-            <a:r>
-              <a:rPr lang="en-US" sz="2200" b="1" dirty="0">
+              <a:t>세 명이에요</a:t>
+            </a:r>
+            <a:r>
+              <a:rPr lang="en-US" sz="1800" b="1" dirty="0">
                 <a:solidFill>
                   <a:srgbClr val="FFFFFF"/>
                 </a:solidFill>
               </a:rPr>
               <a:t>.</a:t>
             </a:r>
-            <a:endParaRPr lang="en-US" sz="2200" dirty="0"/>
+            <a:endParaRPr lang="en-US" sz="1800" dirty="0"/>
           </a:p>
         </p:txBody>
       </p:sp>
       <p:sp>
         <p:nvSpPr>
-          <p:cNvPr id="9" name="num_1"/>
+          <p:cNvPr id="11" name="card_1"/>
           <p:cNvSpPr/>
           <p:nvPr/>
         </p:nvSpPr>
         <p:spPr>
           <a:xfrm>
-            <a:off x="548640" y="2973629"/>
-            <a:ext cx="457200" cy="457200"/>
+            <a:off x="2803550" y="1965960"/>
+            <a:ext cx="2072030" cy="4206240"/>
+          </a:xfrm>
+          <a:prstGeom prst="roundRect">
+            <a:avLst>
+              <a:gd name="adj" fmla="val 6620"/>
+            </a:avLst>
+          </a:prstGeom>
+          <a:solidFill>
+            <a:srgbClr val="FFFFFF"/>
+          </a:solidFill>
+          <a:ln w="12700">
+            <a:solidFill>
+              <a:srgbClr val="D9D7F7"/>
+            </a:solidFill>
+            <a:prstDash val="solid"/>
+          </a:ln>
+          <a:effectLst>
+            <a:outerShdw blurRad="76200" dist="25400" dir="5400000" algn="bl" rotWithShape="0">
+              <a:srgbClr val="14142B">
+                <a:alpha val="12000"/>
+              </a:srgbClr>
+            </a:outerShdw>
+          </a:effectLst>
+        </p:spPr>
+      </p:sp>
+      <p:pic>
+        <p:nvPicPr>
+          <p:cNvPr id="12" name="item_img_1" descr="C:\Users\Chingu\AppData\Local\Temp\claude\C--Users-Chingu-Desktop-ACADEMIASEULWEB\d4111e1b-5523-44ea-97b2-b1a1d9545b9e\scratchpad\decks\cache\img_86dcb615e9ab2ea7.png"/>
+          <p:cNvPicPr>
+            <a:picLocks noChangeAspect="1"/>
+          </p:cNvPicPr>
+          <p:nvPr/>
+        </p:nvPicPr>
+        <p:blipFill>
+          <a:blip r:embed="rId4"/>
+          <a:stretch>
+            <a:fillRect/>
+          </a:stretch>
+        </p:blipFill>
+        <p:spPr>
+          <a:xfrm>
+            <a:off x="2913278" y="2388413"/>
+            <a:ext cx="1852574" cy="1852574"/>
+          </a:xfrm>
+          <a:prstGeom prst="rect">
+            <a:avLst/>
+          </a:prstGeom>
+        </p:spPr>
+      </p:pic>
+      <p:sp>
+        <p:nvSpPr>
+          <p:cNvPr id="13" name="num_1"/>
+          <p:cNvSpPr/>
+          <p:nvPr/>
+        </p:nvSpPr>
+        <p:spPr>
+          <a:xfrm>
+            <a:off x="2894990" y="2057400"/>
+            <a:ext cx="420624" cy="420624"/>
           </a:xfrm>
           <a:prstGeom prst="ellipse">
             <a:avLst/>
@@ -16375,9 +16562,9 @@
           <a:solidFill>
             <a:srgbClr val="003478"/>
           </a:solidFill>
-          <a:ln w="12700">
+          <a:ln w="19050">
             <a:solidFill>
-              <a:srgbClr val="003478"/>
+              <a:srgbClr val="FFFFFF"/>
             </a:solidFill>
             <a:prstDash val="solid"/>
           </a:ln>
@@ -16385,14 +16572,14 @@
       </p:sp>
       <p:sp>
         <p:nvSpPr>
-          <p:cNvPr id="10" name="Text 8"/>
+          <p:cNvPr id="14" name="Text 10"/>
           <p:cNvSpPr txBox="1"/>
           <p:nvPr/>
         </p:nvSpPr>
         <p:spPr>
           <a:xfrm>
-            <a:off x="548640" y="2973629"/>
-            <a:ext cx="457200" cy="457200"/>
+            <a:off x="2894990" y="2057400"/>
+            <a:ext cx="420624" cy="420624"/>
           </a:xfrm>
           <a:prstGeom prst="rect">
             <a:avLst/>
@@ -16410,27 +16597,27 @@
               <a:buNone/>
             </a:pPr>
             <a:r>
-              <a:rPr lang="en-US" sz="1600" b="1" dirty="0">
+              <a:rPr lang="en-US" sz="1500" b="1" dirty="0">
                 <a:solidFill>
                   <a:srgbClr val="FFFFFF"/>
                 </a:solidFill>
               </a:rPr>
               <a:t>2</a:t>
             </a:r>
-            <a:endParaRPr lang="en-US" sz="1600" dirty="0"/>
+            <a:endParaRPr lang="en-US" sz="1500" dirty="0"/>
           </a:p>
         </p:txBody>
       </p:sp>
       <p:sp>
         <p:nvSpPr>
-          <p:cNvPr id="11" name="Text 9"/>
+          <p:cNvPr id="15" name="Text 11"/>
           <p:cNvSpPr txBox="1"/>
           <p:nvPr/>
         </p:nvSpPr>
         <p:spPr>
           <a:xfrm>
-            <a:off x="1188720" y="2832811"/>
-            <a:ext cx="6080760" cy="738835"/>
+            <a:off x="2894990" y="4617720"/>
+            <a:ext cx="1889150" cy="777240"/>
           </a:xfrm>
           <a:prstGeom prst="rect">
             <a:avLst/>
@@ -16444,35 +16631,35 @@
           </a:bodyPr>
           <a:lstStyle/>
           <a:p>
-            <a:pPr marL="0" indent="0" eaLnBrk="1">
+            <a:pPr marL="0" indent="0" algn="ctr" eaLnBrk="1">
               <a:buNone/>
             </a:pPr>
             <a:r>
-              <a:rPr lang="en-US" sz="2400" dirty="0">
+              <a:rPr lang="en-US" sz="2200" dirty="0">
                 <a:solidFill>
                   <a:srgbClr val="14142B"/>
                 </a:solidFill>
               </a:rPr>
               <a:t>Grupo ②</a:t>
             </a:r>
-            <a:endParaRPr lang="en-US" sz="2400" dirty="0"/>
+            <a:endParaRPr lang="en-US" sz="2200" dirty="0"/>
           </a:p>
         </p:txBody>
       </p:sp>
       <p:sp>
         <p:nvSpPr>
-          <p:cNvPr id="12" name="rev_22_caja"/>
+          <p:cNvPr id="16" name="rev_22_caja"/>
           <p:cNvSpPr/>
           <p:nvPr/>
         </p:nvSpPr>
         <p:spPr>
           <a:xfrm>
-            <a:off x="7498080" y="2869387"/>
-            <a:ext cx="4142232" cy="665683"/>
+            <a:off x="2913278" y="5440680"/>
+            <a:ext cx="1852574" cy="640080"/>
           </a:xfrm>
           <a:prstGeom prst="roundRect">
             <a:avLst>
-              <a:gd name="adj" fmla="val 16484"/>
+              <a:gd name="adj" fmla="val 17143"/>
             </a:avLst>
           </a:prstGeom>
           <a:solidFill>
@@ -16488,14 +16675,14 @@
       </p:sp>
       <p:sp>
         <p:nvSpPr>
-          <p:cNvPr id="13" name="rev_22_txt"/>
+          <p:cNvPr id="17" name="rev_22_txt"/>
           <p:cNvSpPr txBox="1"/>
           <p:nvPr/>
         </p:nvSpPr>
         <p:spPr>
           <a:xfrm>
-            <a:off x="7589520" y="2869387"/>
-            <a:ext cx="3959352" cy="665683"/>
+            <a:off x="2940710" y="5440680"/>
+            <a:ext cx="1797710" cy="640080"/>
           </a:xfrm>
           <a:prstGeom prst="rect">
             <a:avLst/>
@@ -16513,7 +16700,7 @@
               <a:buNone/>
             </a:pPr>
             <a:r>
-              <a:rPr lang="ko-KR" altLang="en-US" sz="2200" b="1" dirty="0">
+              <a:rPr lang="ko-KR" altLang="en-US" sz="1800" b="1" dirty="0">
                 <a:solidFill>
                   <a:srgbClr val="FFFFFF"/>
                 </a:solidFill>
@@ -16521,30 +16708,88 @@
                 <a:ea typeface="Malgun Gothic" pitchFamily="34" charset="-122"/>
                 <a:cs typeface="Malgun Gothic" pitchFamily="34" charset="-120"/>
               </a:rPr>
-              <a:t>다섯 명이에요</a:t>
-            </a:r>
-            <a:r>
-              <a:rPr lang="en-US" sz="2200" b="1" dirty="0">
+              <a:t>다섯 명이에요</a:t>
+            </a:r>
+            <a:r>
+              <a:rPr lang="en-US" sz="1800" b="1" dirty="0">
                 <a:solidFill>
                   <a:srgbClr val="FFFFFF"/>
                 </a:solidFill>
               </a:rPr>
               <a:t>.</a:t>
             </a:r>
-            <a:endParaRPr lang="en-US" sz="2200" dirty="0"/>
+            <a:endParaRPr lang="en-US" sz="1800" dirty="0"/>
           </a:p>
         </p:txBody>
       </p:sp>
       <p:sp>
         <p:nvSpPr>
-          <p:cNvPr id="14" name="num_2"/>
+          <p:cNvPr id="18" name="card_2"/>
           <p:cNvSpPr/>
           <p:nvPr/>
         </p:nvSpPr>
         <p:spPr>
           <a:xfrm>
-            <a:off x="548640" y="3840480"/>
-            <a:ext cx="457200" cy="457200"/>
+            <a:off x="5058461" y="1965960"/>
+            <a:ext cx="2072030" cy="4206240"/>
+          </a:xfrm>
+          <a:prstGeom prst="roundRect">
+            <a:avLst>
+              <a:gd name="adj" fmla="val 6620"/>
+            </a:avLst>
+          </a:prstGeom>
+          <a:solidFill>
+            <a:srgbClr val="FFFFFF"/>
+          </a:solidFill>
+          <a:ln w="12700">
+            <a:solidFill>
+              <a:srgbClr val="D9D7F7"/>
+            </a:solidFill>
+            <a:prstDash val="solid"/>
+          </a:ln>
+          <a:effectLst>
+            <a:outerShdw blurRad="76200" dist="25400" dir="5400000" algn="bl" rotWithShape="0">
+              <a:srgbClr val="14142B">
+                <a:alpha val="12000"/>
+              </a:srgbClr>
+            </a:outerShdw>
+          </a:effectLst>
+        </p:spPr>
+      </p:sp>
+      <p:pic>
+        <p:nvPicPr>
+          <p:cNvPr id="19" name="item_img_2" descr="C:\Users\Chingu\AppData\Local\Temp\claude\C--Users-Chingu-Desktop-ACADEMIASEULWEB\d4111e1b-5523-44ea-97b2-b1a1d9545b9e\scratchpad\decks\cache\img_5961c88dc95bc989.png"/>
+          <p:cNvPicPr>
+            <a:picLocks noChangeAspect="1"/>
+          </p:cNvPicPr>
+          <p:nvPr/>
+        </p:nvPicPr>
+        <p:blipFill>
+          <a:blip r:embed="rId5"/>
+          <a:stretch>
+            <a:fillRect/>
+          </a:stretch>
+        </p:blipFill>
+        <p:spPr>
+          <a:xfrm>
+            <a:off x="5168189" y="2388413"/>
+            <a:ext cx="1852574" cy="1852574"/>
+          </a:xfrm>
+          <a:prstGeom prst="rect">
+            <a:avLst/>
+          </a:prstGeom>
+        </p:spPr>
+      </p:pic>
+      <p:sp>
+        <p:nvSpPr>
+          <p:cNvPr id="20" name="num_2"/>
+          <p:cNvSpPr/>
+          <p:nvPr/>
+        </p:nvSpPr>
+        <p:spPr>
+          <a:xfrm>
+            <a:off x="5149901" y="2057400"/>
+            <a:ext cx="420624" cy="420624"/>
           </a:xfrm>
           <a:prstGeom prst="ellipse">
             <a:avLst/>
@@ -16552,9 +16797,9 @@
           <a:solidFill>
             <a:srgbClr val="003478"/>
           </a:solidFill>
-          <a:ln w="12700">
+          <a:ln w="19050">
             <a:solidFill>
-              <a:srgbClr val="003478"/>
+              <a:srgbClr val="FFFFFF"/>
             </a:solidFill>
             <a:prstDash val="solid"/>
           </a:ln>
@@ -16562,14 +16807,14 @@
       </p:sp>
       <p:sp>
         <p:nvSpPr>
-          <p:cNvPr id="15" name="Text 13"/>
+          <p:cNvPr id="21" name="Text 16"/>
           <p:cNvSpPr txBox="1"/>
           <p:nvPr/>
         </p:nvSpPr>
         <p:spPr>
           <a:xfrm>
-            <a:off x="548640" y="3840480"/>
-            <a:ext cx="457200" cy="457200"/>
+            <a:off x="5149901" y="2057400"/>
+            <a:ext cx="420624" cy="420624"/>
           </a:xfrm>
           <a:prstGeom prst="rect">
             <a:avLst/>
@@ -16587,27 +16832,27 @@
               <a:buNone/>
             </a:pPr>
             <a:r>
-              <a:rPr lang="en-US" sz="1600" b="1" dirty="0">
+              <a:rPr lang="en-US" sz="1500" b="1" dirty="0">
                 <a:solidFill>
                   <a:srgbClr val="FFFFFF"/>
                 </a:solidFill>
               </a:rPr>
               <a:t>3</a:t>
             </a:r>
-            <a:endParaRPr lang="en-US" sz="1600" dirty="0"/>
+            <a:endParaRPr lang="en-US" sz="1500" dirty="0"/>
           </a:p>
         </p:txBody>
       </p:sp>
       <p:sp>
         <p:nvSpPr>
-          <p:cNvPr id="16" name="Text 14"/>
+          <p:cNvPr id="22" name="Text 17"/>
           <p:cNvSpPr txBox="1"/>
           <p:nvPr/>
         </p:nvSpPr>
         <p:spPr>
           <a:xfrm>
-            <a:off x="1188720" y="3699662"/>
-            <a:ext cx="6080760" cy="738835"/>
+            <a:off x="5149901" y="4617720"/>
+            <a:ext cx="1889150" cy="777240"/>
           </a:xfrm>
           <a:prstGeom prst="rect">
             <a:avLst/>
@@ -16621,35 +16866,35 @@
           </a:bodyPr>
           <a:lstStyle/>
           <a:p>
-            <a:pPr marL="0" indent="0" eaLnBrk="1">
+            <a:pPr marL="0" indent="0" algn="ctr" eaLnBrk="1">
               <a:buNone/>
             </a:pPr>
             <a:r>
-              <a:rPr lang="en-US" sz="2400" dirty="0">
+              <a:rPr lang="en-US" sz="2200" dirty="0">
                 <a:solidFill>
                   <a:srgbClr val="14142B"/>
                 </a:solidFill>
               </a:rPr>
               <a:t>Grupo ③</a:t>
             </a:r>
-            <a:endParaRPr lang="en-US" sz="2400" dirty="0"/>
+            <a:endParaRPr lang="en-US" sz="2200" dirty="0"/>
           </a:p>
         </p:txBody>
       </p:sp>
       <p:sp>
         <p:nvSpPr>
-          <p:cNvPr id="17" name="rev_23_caja"/>
+          <p:cNvPr id="23" name="rev_23_caja"/>
           <p:cNvSpPr/>
           <p:nvPr/>
         </p:nvSpPr>
         <p:spPr>
           <a:xfrm>
-            <a:off x="7498080" y="3736238"/>
-            <a:ext cx="4142232" cy="665683"/>
+            <a:off x="5168189" y="5440680"/>
+            <a:ext cx="1852574" cy="640080"/>
           </a:xfrm>
           <a:prstGeom prst="roundRect">
             <a:avLst>
-              <a:gd name="adj" fmla="val 16484"/>
+              <a:gd name="adj" fmla="val 17143"/>
             </a:avLst>
           </a:prstGeom>
           <a:solidFill>
@@ -16665,14 +16910,14 @@
       </p:sp>
       <p:sp>
         <p:nvSpPr>
-          <p:cNvPr id="18" name="rev_23_txt"/>
+          <p:cNvPr id="24" name="rev_23_txt"/>
           <p:cNvSpPr txBox="1"/>
           <p:nvPr/>
         </p:nvSpPr>
         <p:spPr>
           <a:xfrm>
-            <a:off x="7589520" y="3736238"/>
-            <a:ext cx="3959352" cy="665683"/>
+            <a:off x="5195621" y="5440680"/>
+            <a:ext cx="1797710" cy="640080"/>
           </a:xfrm>
           <a:prstGeom prst="rect">
             <a:avLst/>
@@ -16690,7 +16935,7 @@
               <a:buNone/>
             </a:pPr>
             <a:r>
-              <a:rPr lang="ko-KR" altLang="en-US" sz="2200" b="1" dirty="0">
+              <a:rPr lang="ko-KR" altLang="en-US" sz="1800" b="1" dirty="0">
                 <a:solidFill>
                   <a:srgbClr val="FFFFFF"/>
                 </a:solidFill>
@@ -16698,30 +16943,88 @@
                 <a:ea typeface="Malgun Gothic" pitchFamily="34" charset="-122"/>
                 <a:cs typeface="Malgun Gothic" pitchFamily="34" charset="-120"/>
               </a:rPr>
-              <a:t>한 명이에요</a:t>
-            </a:r>
-            <a:r>
-              <a:rPr lang="en-US" sz="2200" b="1" dirty="0">
+              <a:t>한 명이에요</a:t>
+            </a:r>
+            <a:r>
+              <a:rPr lang="en-US" sz="1800" b="1" dirty="0">
                 <a:solidFill>
                   <a:srgbClr val="FFFFFF"/>
                 </a:solidFill>
               </a:rPr>
               <a:t>.</a:t>
             </a:r>
-            <a:endParaRPr lang="en-US" sz="2200" dirty="0"/>
+            <a:endParaRPr lang="en-US" sz="1800" dirty="0"/>
           </a:p>
         </p:txBody>
       </p:sp>
       <p:sp>
         <p:nvSpPr>
-          <p:cNvPr id="19" name="num_3"/>
+          <p:cNvPr id="25" name="card_3"/>
           <p:cNvSpPr/>
           <p:nvPr/>
         </p:nvSpPr>
         <p:spPr>
           <a:xfrm>
-            <a:off x="548640" y="4707331"/>
-            <a:ext cx="457200" cy="457200"/>
+            <a:off x="7313371" y="1965960"/>
+            <a:ext cx="2072030" cy="4206240"/>
+          </a:xfrm>
+          <a:prstGeom prst="roundRect">
+            <a:avLst>
+              <a:gd name="adj" fmla="val 6620"/>
+            </a:avLst>
+          </a:prstGeom>
+          <a:solidFill>
+            <a:srgbClr val="FFFFFF"/>
+          </a:solidFill>
+          <a:ln w="12700">
+            <a:solidFill>
+              <a:srgbClr val="D9D7F7"/>
+            </a:solidFill>
+            <a:prstDash val="solid"/>
+          </a:ln>
+          <a:effectLst>
+            <a:outerShdw blurRad="76200" dist="25400" dir="5400000" algn="bl" rotWithShape="0">
+              <a:srgbClr val="14142B">
+                <a:alpha val="12000"/>
+              </a:srgbClr>
+            </a:outerShdw>
+          </a:effectLst>
+        </p:spPr>
+      </p:sp>
+      <p:pic>
+        <p:nvPicPr>
+          <p:cNvPr id="26" name="item_img_3" descr="C:\Users\Chingu\AppData\Local\Temp\claude\C--Users-Chingu-Desktop-ACADEMIASEULWEB\d4111e1b-5523-44ea-97b2-b1a1d9545b9e\scratchpad\decks\cache\img_bbc8dc660af6514e.png"/>
+          <p:cNvPicPr>
+            <a:picLocks noChangeAspect="1"/>
+          </p:cNvPicPr>
+          <p:nvPr/>
+        </p:nvPicPr>
+        <p:blipFill>
+          <a:blip r:embed="rId6"/>
+          <a:stretch>
+            <a:fillRect/>
+          </a:stretch>
+        </p:blipFill>
+        <p:spPr>
+          <a:xfrm>
+            <a:off x="7423099" y="2388413"/>
+            <a:ext cx="1852574" cy="1852574"/>
+          </a:xfrm>
+          <a:prstGeom prst="rect">
+            <a:avLst/>
+          </a:prstGeom>
+        </p:spPr>
+      </p:pic>
+      <p:sp>
+        <p:nvSpPr>
+          <p:cNvPr id="27" name="num_3"/>
+          <p:cNvSpPr/>
+          <p:nvPr/>
+        </p:nvSpPr>
+        <p:spPr>
+          <a:xfrm>
+            <a:off x="7404811" y="2057400"/>
+            <a:ext cx="420624" cy="420624"/>
           </a:xfrm>
           <a:prstGeom prst="ellipse">
             <a:avLst/>
@@ -16729,9 +17032,9 @@
           <a:solidFill>
             <a:srgbClr val="003478"/>
           </a:solidFill>
-          <a:ln w="12700">
+          <a:ln w="19050">
             <a:solidFill>
-              <a:srgbClr val="003478"/>
+              <a:srgbClr val="FFFFFF"/>
             </a:solidFill>
             <a:prstDash val="solid"/>
           </a:ln>
@@ -16739,14 +17042,14 @@
       </p:sp>
       <p:sp>
         <p:nvSpPr>
-          <p:cNvPr id="20" name="Text 18"/>
+          <p:cNvPr id="28" name="Text 22"/>
           <p:cNvSpPr txBox="1"/>
           <p:nvPr/>
         </p:nvSpPr>
         <p:spPr>
           <a:xfrm>
-            <a:off x="548640" y="4707331"/>
-            <a:ext cx="457200" cy="457200"/>
+            <a:off x="7404811" y="2057400"/>
+            <a:ext cx="420624" cy="420624"/>
           </a:xfrm>
           <a:prstGeom prst="rect">
             <a:avLst/>
@@ -16764,27 +17067,27 @@
               <a:buNone/>
             </a:pPr>
             <a:r>
-              <a:rPr lang="en-US" sz="1600" b="1" dirty="0">
+              <a:rPr lang="en-US" sz="1500" b="1" dirty="0">
                 <a:solidFill>
                   <a:srgbClr val="FFFFFF"/>
                 </a:solidFill>
               </a:rPr>
               <a:t>4</a:t>
             </a:r>
-            <a:endParaRPr lang="en-US" sz="1600" dirty="0"/>
+            <a:endParaRPr lang="en-US" sz="1500" dirty="0"/>
           </a:p>
         </p:txBody>
       </p:sp>
       <p:sp>
         <p:nvSpPr>
-          <p:cNvPr id="21" name="Text 19"/>
+          <p:cNvPr id="29" name="Text 23"/>
           <p:cNvSpPr txBox="1"/>
           <p:nvPr/>
         </p:nvSpPr>
         <p:spPr>
           <a:xfrm>
-            <a:off x="1188720" y="4566514"/>
-            <a:ext cx="6080760" cy="738835"/>
+            <a:off x="7404811" y="4617720"/>
+            <a:ext cx="1889150" cy="777240"/>
           </a:xfrm>
           <a:prstGeom prst="rect">
             <a:avLst/>
@@ -16798,35 +17101,35 @@
           </a:bodyPr>
           <a:lstStyle/>
           <a:p>
-            <a:pPr marL="0" indent="0" eaLnBrk="1">
+            <a:pPr marL="0" indent="0" algn="ctr" eaLnBrk="1">
               <a:buNone/>
             </a:pPr>
             <a:r>
-              <a:rPr lang="en-US" sz="2400" dirty="0">
+              <a:rPr lang="en-US" sz="2200" dirty="0">
                 <a:solidFill>
                   <a:srgbClr val="14142B"/>
                 </a:solidFill>
               </a:rPr>
               <a:t>Grupo ④</a:t>
             </a:r>
-            <a:endParaRPr lang="en-US" sz="2400" dirty="0"/>
+            <a:endParaRPr lang="en-US" sz="2200" dirty="0"/>
           </a:p>
         </p:txBody>
       </p:sp>
       <p:sp>
         <p:nvSpPr>
-          <p:cNvPr id="22" name="rev_24_caja"/>
+          <p:cNvPr id="30" name="rev_24_caja"/>
           <p:cNvSpPr/>
           <p:nvPr/>
         </p:nvSpPr>
         <p:spPr>
           <a:xfrm>
-            <a:off x="7498080" y="4603090"/>
-            <a:ext cx="4142232" cy="665683"/>
+            <a:off x="7423099" y="5440680"/>
+            <a:ext cx="1852574" cy="640080"/>
           </a:xfrm>
           <a:prstGeom prst="roundRect">
             <a:avLst>
-              <a:gd name="adj" fmla="val 16484"/>
+              <a:gd name="adj" fmla="val 17143"/>
             </a:avLst>
           </a:prstGeom>
           <a:solidFill>
@@ -16842,14 +17145,14 @@
       </p:sp>
       <p:sp>
         <p:nvSpPr>
-          <p:cNvPr id="23" name="rev_24_txt"/>
+          <p:cNvPr id="31" name="rev_24_txt"/>
           <p:cNvSpPr txBox="1"/>
           <p:nvPr/>
         </p:nvSpPr>
         <p:spPr>
           <a:xfrm>
-            <a:off x="7589520" y="4603090"/>
-            <a:ext cx="3959352" cy="665683"/>
+            <a:off x="7450531" y="5440680"/>
+            <a:ext cx="1797710" cy="640080"/>
           </a:xfrm>
           <a:prstGeom prst="rect">
             <a:avLst/>
@@ -16867,7 +17170,7 @@
               <a:buNone/>
             </a:pPr>
             <a:r>
-              <a:rPr lang="ko-KR" altLang="en-US" sz="2200" b="1" dirty="0">
+              <a:rPr lang="ko-KR" altLang="en-US" sz="1800" b="1" dirty="0">
                 <a:solidFill>
                   <a:srgbClr val="FFFFFF"/>
                 </a:solidFill>
@@ -16875,30 +17178,88 @@
                 <a:ea typeface="Malgun Gothic" pitchFamily="34" charset="-122"/>
                 <a:cs typeface="Malgun Gothic" pitchFamily="34" charset="-120"/>
               </a:rPr>
-              <a:t>네 명이에요</a:t>
-            </a:r>
-            <a:r>
-              <a:rPr lang="en-US" sz="2200" b="1" dirty="0">
+              <a:t>네 명이에요</a:t>
+            </a:r>
+            <a:r>
+              <a:rPr lang="en-US" sz="1800" b="1" dirty="0">
                 <a:solidFill>
                   <a:srgbClr val="FFFFFF"/>
                 </a:solidFill>
               </a:rPr>
               <a:t>.</a:t>
             </a:r>
-            <a:endParaRPr lang="en-US" sz="2200" dirty="0"/>
+            <a:endParaRPr lang="en-US" sz="1800" dirty="0"/>
           </a:p>
         </p:txBody>
       </p:sp>
       <p:sp>
         <p:nvSpPr>
-          <p:cNvPr id="24" name="num_4"/>
+          <p:cNvPr id="32" name="card_4"/>
           <p:cNvSpPr/>
           <p:nvPr/>
         </p:nvSpPr>
         <p:spPr>
           <a:xfrm>
-            <a:off x="548640" y="5574182"/>
-            <a:ext cx="457200" cy="457200"/>
+            <a:off x="9568282" y="1965960"/>
+            <a:ext cx="2072030" cy="4206240"/>
+          </a:xfrm>
+          <a:prstGeom prst="roundRect">
+            <a:avLst>
+              <a:gd name="adj" fmla="val 6620"/>
+            </a:avLst>
+          </a:prstGeom>
+          <a:solidFill>
+            <a:srgbClr val="FFFFFF"/>
+          </a:solidFill>
+          <a:ln w="12700">
+            <a:solidFill>
+              <a:srgbClr val="D9D7F7"/>
+            </a:solidFill>
+            <a:prstDash val="solid"/>
+          </a:ln>
+          <a:effectLst>
+            <a:outerShdw blurRad="76200" dist="25400" dir="5400000" algn="bl" rotWithShape="0">
+              <a:srgbClr val="14142B">
+                <a:alpha val="12000"/>
+              </a:srgbClr>
+            </a:outerShdw>
+          </a:effectLst>
+        </p:spPr>
+      </p:sp>
+      <p:pic>
+        <p:nvPicPr>
+          <p:cNvPr id="33" name="item_img_4" descr="C:\Users\Chingu\AppData\Local\Temp\claude\C--Users-Chingu-Desktop-ACADEMIASEULWEB\d4111e1b-5523-44ea-97b2-b1a1d9545b9e\scratchpad\decks\cache\img_e0056a526fde56c4.png"/>
+          <p:cNvPicPr>
+            <a:picLocks noChangeAspect="1"/>
+          </p:cNvPicPr>
+          <p:nvPr/>
+        </p:nvPicPr>
+        <p:blipFill>
+          <a:blip r:embed="rId7"/>
+          <a:stretch>
+            <a:fillRect/>
+          </a:stretch>
+        </p:blipFill>
+        <p:spPr>
+          <a:xfrm>
+            <a:off x="9678010" y="2388413"/>
+            <a:ext cx="1852574" cy="1852574"/>
+          </a:xfrm>
+          <a:prstGeom prst="rect">
+            <a:avLst/>
+          </a:prstGeom>
+        </p:spPr>
+      </p:pic>
+      <p:sp>
+        <p:nvSpPr>
+          <p:cNvPr id="34" name="num_4"/>
+          <p:cNvSpPr/>
+          <p:nvPr/>
+        </p:nvSpPr>
+        <p:spPr>
+          <a:xfrm>
+            <a:off x="9659722" y="2057400"/>
+            <a:ext cx="420624" cy="420624"/>
           </a:xfrm>
           <a:prstGeom prst="ellipse">
             <a:avLst/>
@@ -16906,9 +17267,9 @@
           <a:solidFill>
             <a:srgbClr val="003478"/>
           </a:solidFill>
-          <a:ln w="12700">
+          <a:ln w="19050">
             <a:solidFill>
-              <a:srgbClr val="003478"/>
+              <a:srgbClr val="FFFFFF"/>
             </a:solidFill>
             <a:prstDash val="solid"/>
           </a:ln>
@@ -16916,14 +17277,14 @@
       </p:sp>
       <p:sp>
         <p:nvSpPr>
-          <p:cNvPr id="25" name="Text 23"/>
+          <p:cNvPr id="35" name="Text 28"/>
           <p:cNvSpPr txBox="1"/>
           <p:nvPr/>
         </p:nvSpPr>
         <p:spPr>
           <a:xfrm>
-            <a:off x="548640" y="5574182"/>
-            <a:ext cx="457200" cy="457200"/>
+            <a:off x="9659722" y="2057400"/>
+            <a:ext cx="420624" cy="420624"/>
           </a:xfrm>
           <a:prstGeom prst="rect">
             <a:avLst/>
@@ -16941,27 +17302,27 @@
               <a:buNone/>
             </a:pPr>
             <a:r>
-              <a:rPr lang="en-US" sz="1600" b="1" dirty="0">
+              <a:rPr lang="en-US" sz="1500" b="1" dirty="0">
                 <a:solidFill>
                   <a:srgbClr val="FFFFFF"/>
                 </a:solidFill>
               </a:rPr>
               <a:t>5</a:t>
             </a:r>
-            <a:endParaRPr lang="en-US" sz="1600" dirty="0"/>
+            <a:endParaRPr lang="en-US" sz="1500" dirty="0"/>
           </a:p>
         </p:txBody>
       </p:sp>
       <p:sp>
         <p:nvSpPr>
-          <p:cNvPr id="26" name="Text 24"/>
+          <p:cNvPr id="36" name="Text 29"/>
           <p:cNvSpPr txBox="1"/>
           <p:nvPr/>
         </p:nvSpPr>
         <p:spPr>
           <a:xfrm>
-            <a:off x="1188720" y="5433365"/>
-            <a:ext cx="6080760" cy="738835"/>
+            <a:off x="9659722" y="4617720"/>
+            <a:ext cx="1889150" cy="777240"/>
           </a:xfrm>
           <a:prstGeom prst="rect">
             <a:avLst/>
@@ -16975,35 +17336,35 @@
           </a:bodyPr>
           <a:lstStyle/>
           <a:p>
-            <a:pPr marL="0" indent="0" eaLnBrk="1">
+            <a:pPr marL="0" indent="0" algn="ctr" eaLnBrk="1">
               <a:buNone/>
             </a:pPr>
             <a:r>
-              <a:rPr lang="en-US" sz="2400" dirty="0">
+              <a:rPr lang="en-US" sz="2200" dirty="0">
                 <a:solidFill>
                   <a:srgbClr val="14142B"/>
                 </a:solidFill>
               </a:rPr>
               <a:t>Grupo ⑤</a:t>
             </a:r>
-            <a:endParaRPr lang="en-US" sz="2400" dirty="0"/>
+            <a:endParaRPr lang="en-US" sz="2200" dirty="0"/>
           </a:p>
         </p:txBody>
       </p:sp>
       <p:sp>
         <p:nvSpPr>
-          <p:cNvPr id="27" name="rev_25_caja"/>
+          <p:cNvPr id="37" name="rev_25_caja"/>
           <p:cNvSpPr/>
           <p:nvPr/>
         </p:nvSpPr>
         <p:spPr>
           <a:xfrm>
-            <a:off x="7498080" y="5469941"/>
-            <a:ext cx="4142232" cy="665683"/>
+            <a:off x="9678010" y="5440680"/>
+            <a:ext cx="1852574" cy="640080"/>
           </a:xfrm>
           <a:prstGeom prst="roundRect">
             <a:avLst>
-              <a:gd name="adj" fmla="val 16484"/>
+              <a:gd name="adj" fmla="val 17143"/>
             </a:avLst>
           </a:prstGeom>
           <a:solidFill>
@@ -17019,14 +17380,14 @@
       </p:sp>
       <p:sp>
         <p:nvSpPr>
-          <p:cNvPr id="28" name="rev_25_txt"/>
+          <p:cNvPr id="38" name="rev_25_txt"/>
           <p:cNvSpPr txBox="1"/>
           <p:nvPr/>
         </p:nvSpPr>
         <p:spPr>
           <a:xfrm>
-            <a:off x="7589520" y="5469941"/>
-            <a:ext cx="3959352" cy="665683"/>
+            <a:off x="9705442" y="5440680"/>
+            <a:ext cx="1797710" cy="640080"/>
           </a:xfrm>
           <a:prstGeom prst="rect">
             <a:avLst/>
@@ -17044,7 +17405,7 @@
               <a:buNone/>
             </a:pPr>
             <a:r>
-              <a:rPr lang="ko-KR" altLang="en-US" sz="2200" b="1" dirty="0">
+              <a:rPr lang="ko-KR" altLang="en-US" sz="1800" b="1" dirty="0">
                 <a:solidFill>
                   <a:srgbClr val="FFFFFF"/>
                 </a:solidFill>
@@ -17052,23 +17413,23 @@
                 <a:ea typeface="Malgun Gothic" pitchFamily="34" charset="-122"/>
                 <a:cs typeface="Malgun Gothic" pitchFamily="34" charset="-120"/>
               </a:rPr>
-              <a:t>두 명이에요</a:t>
-            </a:r>
-            <a:r>
-              <a:rPr lang="en-US" sz="2200" b="1" dirty="0">
+              <a:t>두 명이에요</a:t>
+            </a:r>
+            <a:r>
+              <a:rPr lang="en-US" sz="1800" b="1" dirty="0">
                 <a:solidFill>
                   <a:srgbClr val="FFFFFF"/>
                 </a:solidFill>
               </a:rPr>
               <a:t>.</a:t>
             </a:r>
-            <a:endParaRPr lang="en-US" sz="2200" dirty="0"/>
+            <a:endParaRPr lang="en-US" sz="1800" dirty="0"/>
           </a:p>
         </p:txBody>
       </p:sp>
       <p:sp>
         <p:nvSpPr>
-          <p:cNvPr id="29" name="Slide Number Placeholder 0"/>
+          <p:cNvPr id="39" name="Slide Number Placeholder 0"/>
           <p:cNvSpPr>
             <a:spLocks noGrp="1"/>
           </p:cNvSpPr>
@@ -17153,7 +17514,7 @@
                                           </p:stCondLst>
                                         </p:cTn>
                                         <p:tgtEl>
-                                          <p:spTgt spid="7"/>
+                                          <p:spTgt spid="9"/>
                                         </p:tgtEl>
                                         <p:attrNameLst>
                                           <p:attrName>style.visibility</p:attrName>
@@ -17180,7 +17541,7 @@
                                           </p:stCondLst>
                                         </p:cTn>
                                         <p:tgtEl>
-                                          <p:spTgt spid="8"/>
+                                          <p:spTgt spid="10"/>
                                         </p:tgtEl>
                                         <p:attrNameLst>
                                           <p:attrName>style.visibility</p:attrName>
@@ -17225,7 +17586,7 @@
                                           </p:stCondLst>
                                         </p:cTn>
                                         <p:tgtEl>
-                                          <p:spTgt spid="12"/>
+                                          <p:spTgt spid="16"/>
                                         </p:tgtEl>
                                         <p:attrNameLst>
                                           <p:attrName>style.visibility</p:attrName>
@@ -17252,7 +17613,7 @@
                                           </p:stCondLst>
                                         </p:cTn>
                                         <p:tgtEl>
-                                          <p:spTgt spid="13"/>
+                                          <p:spTgt spid="17"/>
                                         </p:tgtEl>
                                         <p:attrNameLst>
                                           <p:attrName>style.visibility</p:attrName>
@@ -17297,7 +17658,7 @@
                                           </p:stCondLst>
                                         </p:cTn>
                                         <p:tgtEl>
-                                          <p:spTgt spid="17"/>
+                                          <p:spTgt spid="23"/>
                                         </p:tgtEl>
                                         <p:attrNameLst>
                                           <p:attrName>style.visibility</p:attrName>
@@ -17324,7 +17685,7 @@
                                           </p:stCondLst>
                                         </p:cTn>
                                         <p:tgtEl>
-                                          <p:spTgt spid="18"/>
+                                          <p:spTgt spid="24"/>
                                         </p:tgtEl>
                                         <p:attrNameLst>
                                           <p:attrName>style.visibility</p:attrName>
@@ -17369,7 +17730,7 @@
                                           </p:stCondLst>
                                         </p:cTn>
                                         <p:tgtEl>
-                                          <p:spTgt spid="22"/>
+                                          <p:spTgt spid="30"/>
                                         </p:tgtEl>
                                         <p:attrNameLst>
                                           <p:attrName>style.visibility</p:attrName>
@@ -17396,7 +17757,7 @@
                                           </p:stCondLst>
                                         </p:cTn>
                                         <p:tgtEl>
-                                          <p:spTgt spid="23"/>
+                                          <p:spTgt spid="31"/>
                                         </p:tgtEl>
                                         <p:attrNameLst>
                                           <p:attrName>style.visibility</p:attrName>
@@ -17441,7 +17802,7 @@
                                           </p:stCondLst>
                                         </p:cTn>
                                         <p:tgtEl>
-                                          <p:spTgt spid="27"/>
+                                          <p:spTgt spid="37"/>
                                         </p:tgtEl>
                                         <p:attrNameLst>
                                           <p:attrName>style.visibility</p:attrName>
@@ -17468,7 +17829,7 @@
                                           </p:stCondLst>
                                         </p:cTn>
                                         <p:tgtEl>
-                                          <p:spTgt spid="28"/>
+                                          <p:spTgt spid="38"/>
                                         </p:tgtEl>
                                         <p:attrNameLst>
                                           <p:attrName>style.visibility</p:attrName>
@@ -17509,11 +17870,11 @@
       </p:par>
     </p:tnLst>
     <p:bldLst>
-      <p:bldP spid="8" grpId="0" animBg="1"/>
-      <p:bldP spid="13" grpId="0" animBg="1"/>
-      <p:bldP spid="18" grpId="0" animBg="1"/>
-      <p:bldP spid="23" grpId="0" animBg="1"/>
-      <p:bldP spid="28" grpId="0" animBg="1"/>
+      <p:bldP spid="10" grpId="0" animBg="1"/>
+      <p:bldP spid="17" grpId="0" animBg="1"/>
+      <p:bldP spid="24" grpId="0" animBg="1"/>
+      <p:bldP spid="31" grpId="0" animBg="1"/>
+      <p:bldP spid="38" grpId="0" animBg="1"/>
     </p:bldLst>
   </p:timing>
 </p:sld>
@@ -17593,7 +17954,7 @@
         <p:spPr>
           <a:xfrm>
             <a:off x="548640" y="1325880"/>
-            <a:ext cx="6949440" cy="548640"/>
+            <a:ext cx="5669280" cy="548640"/>
           </a:xfrm>
           <a:prstGeom prst="rect">
             <a:avLst/>
@@ -17680,7 +18041,7 @@
         <p:spPr>
           <a:xfrm>
             <a:off x="548640" y="1965960"/>
-            <a:ext cx="6949440" cy="4206240"/>
+            <a:ext cx="5669280" cy="4206240"/>
           </a:xfrm>
           <a:prstGeom prst="rect">
             <a:avLst/>
@@ -17886,12 +18247,12 @@
         </p:nvSpPr>
         <p:spPr>
           <a:xfrm>
-            <a:off x="8001000" y="1417320"/>
-            <a:ext cx="3611880" cy="4480560"/>
+            <a:off x="6446520" y="1371600"/>
+            <a:ext cx="5193792" cy="4800600"/>
           </a:xfrm>
           <a:prstGeom prst="roundRect">
             <a:avLst>
-              <a:gd name="adj" fmla="val 6329"/>
+              <a:gd name="adj" fmla="val 4762"/>
             </a:avLst>
           </a:prstGeom>
           <a:solidFill>
@@ -17905,58 +18266,30 @@
           </a:ln>
         </p:spPr>
       </p:sp>
-      <p:sp>
-        <p:nvSpPr>
-          <p:cNvPr id="6" name="imagen_pendiente"/>
-          <p:cNvSpPr txBox="1"/>
-          <p:nvPr/>
-        </p:nvSpPr>
-        <p:spPr>
-          <a:xfrm>
-            <a:off x="8183880" y="1600200"/>
-            <a:ext cx="3246120" cy="4114800"/>
+      <p:pic>
+        <p:nvPicPr>
+          <p:cNvPr id="6" name="imagen" descr="C:\Users\Chingu\AppData\Local\Temp\claude\C--Users-Chingu-Desktop-ACADEMIASEULWEB\d4111e1b-5523-44ea-97b2-b1a1d9545b9e\scratchpad\decks\cache\img_de00d0c2c8ab954e.png"/>
+          <p:cNvPicPr>
+            <a:picLocks noChangeAspect="1"/>
+          </p:cNvPicPr>
+          <p:nvPr/>
+        </p:nvPicPr>
+        <p:blipFill>
+          <a:blip r:embed="rId3"/>
+          <a:stretch>
+            <a:fillRect/>
+          </a:stretch>
+        </p:blipFill>
+        <p:spPr>
+          <a:xfrm>
+            <a:off x="7040833" y="1463040"/>
+            <a:ext cx="4005165" cy="4617720"/>
           </a:xfrm>
           <a:prstGeom prst="rect">
             <a:avLst/>
           </a:prstGeom>
-          <a:noFill/>
-          <a:ln/>
-        </p:spPr>
-        <p:txBody>
-          <a:bodyPr wrap="square" lIns="76200" tIns="76200" rIns="76200" bIns="76200" rtlCol="0" anchor="ctr">
-            <a:normAutofit/>
-          </a:bodyPr>
-          <a:lstStyle/>
-          <a:p>
-            <a:pPr marL="0" indent="0" algn="ctr" eaLnBrk="1">
-              <a:buNone/>
-            </a:pPr>
-            <a:r>
-              <a:rPr lang="en-US" sz="1600" b="1" dirty="0">
-                <a:solidFill>
-                  <a:srgbClr val="4236F6"/>
-                </a:solidFill>
-              </a:rPr>
-              <a:t>Imagen pendiente</a:t>
-            </a:r>
-            <a:endParaRPr lang="en-US" sz="1600" dirty="0"/>
-          </a:p>
-          <a:p>
-            <a:pPr marL="0" indent="0" algn="ctr" eaLnBrk="1">
-              <a:buNone/>
-            </a:pPr>
-            <a:r>
-              <a:rPr lang="en-US" sz="1300" dirty="0">
-                <a:solidFill>
-                  <a:srgbClr val="5C5F6B"/>
-                </a:solidFill>
-              </a:rPr>
-              <a:t>Dibujo: a la izquierda, Kiran con un libro en la mano; a la derecha, un alumno con una taza sobre su mesa; al fondo, lejos de los dos, un reloj en la pared. Flecha ① a la taza y flecha ② al reloj. Sin rojo (tampoco en las flechas).</a:t>
-            </a:r>
-            <a:endParaRPr lang="en-US" sz="1600" dirty="0"/>
-          </a:p>
-        </p:txBody>
-      </p:sp>
+        </p:spPr>
+      </p:pic>
       <p:sp>
         <p:nvSpPr>
           <p:cNvPr id="25" name="Slide Number Placeholder 0"/>
@@ -18087,7 +18420,7 @@
         <p:spPr>
           <a:xfrm>
             <a:off x="548640" y="1325880"/>
-            <a:ext cx="11064240" cy="457200"/>
+            <a:ext cx="11091672" cy="457200"/>
           </a:xfrm>
           <a:prstGeom prst="rect">
             <a:avLst/>
@@ -18308,14 +18641,14 @@
               <a:buChar char="•"/>
             </a:pPr>
             <a:r>
-              <a:rPr lang="en-US" sz="1800" dirty="0">
+              <a:rPr lang="en-US" sz="1600" dirty="0">
                 <a:solidFill>
                   <a:srgbClr val="14142B"/>
                 </a:solidFill>
               </a:rPr>
               <a:t>Muestra tu foto o comparte pantalla</a:t>
             </a:r>
-            <a:endParaRPr lang="en-US" sz="1800" dirty="0"/>
+            <a:endParaRPr lang="en-US" sz="1600" dirty="0"/>
           </a:p>
           <a:p>
             <a:pPr marL="228600" indent="-228600" eaLnBrk="1">
@@ -18326,7 +18659,7 @@
               <a:buChar char="•"/>
             </a:pPr>
             <a:r>
-              <a:rPr lang="ko-KR" altLang="en-US" sz="1800" dirty="0">
+              <a:rPr lang="ko-KR" altLang="en-US" sz="1600" dirty="0">
                 <a:solidFill>
                   <a:srgbClr val="14142B"/>
                 </a:solidFill>
@@ -18337,7 +18670,7 @@
               <a:t>Presenta a 3 personas: 우리 엄마예요</a:t>
             </a:r>
             <a:r>
-              <a:rPr lang="en-US" sz="1800" dirty="0">
+              <a:rPr lang="en-US" sz="1600" dirty="0">
                 <a:solidFill>
                   <a:srgbClr val="14142B"/>
                 </a:solidFill>
@@ -18345,7 +18678,7 @@
               <a:t>! · </a:t>
             </a:r>
             <a:r>
-              <a:rPr lang="ko-KR" altLang="en-US" sz="1800" dirty="0">
+              <a:rPr lang="ko-KR" altLang="en-US" sz="1600" dirty="0">
                 <a:solidFill>
                   <a:srgbClr val="14142B"/>
                 </a:solidFill>
@@ -18356,7 +18689,7 @@
               <a:t>이분은</a:t>
             </a:r>
             <a:r>
-              <a:rPr lang="en-US" sz="1800" dirty="0">
+              <a:rPr lang="en-US" sz="1600" dirty="0">
                 <a:solidFill>
                   <a:srgbClr val="14142B"/>
                 </a:solidFill>
@@ -18364,7 +18697,7 @@
               <a:t>… · </a:t>
             </a:r>
             <a:r>
-              <a:rPr lang="ko-KR" altLang="en-US" sz="1800" dirty="0">
+              <a:rPr lang="ko-KR" altLang="en-US" sz="1600" dirty="0">
                 <a:solidFill>
                   <a:srgbClr val="14142B"/>
                 </a:solidFill>
@@ -18375,14 +18708,14 @@
               <a:t>이 사람은</a:t>
             </a:r>
             <a:r>
-              <a:rPr lang="en-US" sz="1800" dirty="0">
+              <a:rPr lang="en-US" sz="1600" dirty="0">
                 <a:solidFill>
                   <a:srgbClr val="14142B"/>
                 </a:solidFill>
               </a:rPr>
               <a:t>…</a:t>
             </a:r>
-            <a:endParaRPr lang="en-US" sz="1800" dirty="0"/>
+            <a:endParaRPr lang="en-US" sz="1600" dirty="0"/>
           </a:p>
           <a:p>
             <a:pPr marL="228600" indent="-228600" eaLnBrk="1">
@@ -18393,7 +18726,7 @@
               <a:buChar char="•"/>
             </a:pPr>
             <a:r>
-              <a:rPr lang="ko-KR" altLang="en-US" sz="1800" dirty="0">
+              <a:rPr lang="ko-KR" altLang="en-US" sz="1600" dirty="0">
                 <a:solidFill>
                   <a:srgbClr val="14142B"/>
                 </a:solidFill>
@@ -18404,14 +18737,14 @@
               <a:t>Tu compañero señala y pregunta: 누구예요</a:t>
             </a:r>
             <a:r>
-              <a:rPr lang="en-US" sz="1800" dirty="0">
+              <a:rPr lang="en-US" sz="1600" dirty="0">
                 <a:solidFill>
                   <a:srgbClr val="14142B"/>
                 </a:solidFill>
               </a:rPr>
               <a:t>?</a:t>
             </a:r>
-            <a:endParaRPr lang="en-US" sz="1800" dirty="0"/>
+            <a:endParaRPr lang="en-US" sz="1600" dirty="0"/>
           </a:p>
           <a:p>
             <a:pPr marL="228600" indent="-228600" eaLnBrk="1">
@@ -18422,14 +18755,14 @@
               <a:buChar char="•"/>
             </a:pPr>
             <a:r>
-              <a:rPr lang="en-US" sz="1800" dirty="0">
+              <a:rPr lang="en-US" sz="1600" dirty="0">
                 <a:solidFill>
                   <a:srgbClr val="14142B"/>
                 </a:solidFill>
               </a:rPr>
               <a:t>Después cambian</a:t>
             </a:r>
-            <a:endParaRPr lang="en-US" sz="1800" dirty="0"/>
+            <a:endParaRPr lang="en-US" sz="1600" dirty="0"/>
           </a:p>
         </p:txBody>
       </p:sp>
@@ -19195,7 +19528,7 @@
                 <a:ea typeface="Malgun Gothic" pitchFamily="34" charset="-122"/>
                 <a:cs typeface="Malgun Gothic" pitchFamily="34" charset="-120"/>
               </a:rPr>
-              <a:t>→ 두 명이에요</a:t>
+              <a:t>→ 두 명이에요</a:t>
             </a:r>
             <a:r>
               <a:rPr lang="en-US" sz="2400" dirty="0">
@@ -19214,7 +19547,7 @@
                 <a:ea typeface="Malgun Gothic" pitchFamily="34" charset="-122"/>
                 <a:cs typeface="Malgun Gothic" pitchFamily="34" charset="-120"/>
               </a:rPr>
-              <a:t>세 명이에요</a:t>
+              <a:t>세 명이에요</a:t>
             </a:r>
             <a:r>
               <a:rPr lang="en-US" sz="2400" dirty="0">
@@ -19469,7 +19802,7 @@
               <a:buChar char="•"/>
             </a:pPr>
             <a:r>
-              <a:rPr lang="ko-KR" altLang="en-US" sz="2400" dirty="0">
+              <a:rPr lang="ko-KR" altLang="en-US" sz="2800" dirty="0">
                 <a:solidFill>
                   <a:srgbClr val="14142B"/>
                 </a:solidFill>
@@ -19480,14 +19813,14 @@
               <a:t>누구예요</a:t>
             </a:r>
             <a:r>
-              <a:rPr lang="en-US" sz="2400" dirty="0">
+              <a:rPr lang="en-US" sz="2800" dirty="0">
                 <a:solidFill>
                   <a:srgbClr val="14142B"/>
                 </a:solidFill>
               </a:rPr>
               <a:t>?</a:t>
             </a:r>
-            <a:endParaRPr lang="en-US" sz="2400" dirty="0"/>
+            <a:endParaRPr lang="en-US" sz="2800" dirty="0"/>
           </a:p>
           <a:p>
             <a:pPr marL="228600" indent="-228600" eaLnBrk="1">
@@ -19498,7 +19831,7 @@
               <a:buChar char="•"/>
             </a:pPr>
             <a:r>
-              <a:rPr lang="ko-KR" altLang="en-US" sz="2400" dirty="0">
+              <a:rPr lang="ko-KR" altLang="en-US" sz="2800" dirty="0">
                 <a:solidFill>
                   <a:srgbClr val="14142B"/>
                 </a:solidFill>
@@ -19509,14 +19842,14 @@
               <a:t>우리 엄마예요</a:t>
             </a:r>
             <a:r>
-              <a:rPr lang="en-US" sz="2400" dirty="0">
+              <a:rPr lang="en-US" sz="2800" dirty="0">
                 <a:solidFill>
                   <a:srgbClr val="14142B"/>
                 </a:solidFill>
               </a:rPr>
               <a:t>.</a:t>
             </a:r>
-            <a:endParaRPr lang="en-US" sz="2400" dirty="0"/>
+            <a:endParaRPr lang="en-US" sz="2800" dirty="0"/>
           </a:p>
           <a:p>
             <a:pPr marL="228600" indent="-228600" eaLnBrk="1">
@@ -19527,7 +19860,7 @@
               <a:buChar char="•"/>
             </a:pPr>
             <a:r>
-              <a:rPr lang="ko-KR" altLang="en-US" sz="2400" dirty="0">
+              <a:rPr lang="ko-KR" altLang="en-US" sz="2800" dirty="0">
                 <a:solidFill>
                   <a:srgbClr val="14142B"/>
                 </a:solidFill>
@@ -19535,17 +19868,17 @@
                 <a:ea typeface="Malgun Gothic" pitchFamily="34" charset="-122"/>
                 <a:cs typeface="Malgun Gothic" pitchFamily="34" charset="-120"/>
               </a:rPr>
-              <a:t>우리 가족은 네 명이에요</a:t>
-            </a:r>
-            <a:r>
-              <a:rPr lang="en-US" sz="2400" dirty="0">
+              <a:t>우리 가족은 네 명이에요</a:t>
+            </a:r>
+            <a:r>
+              <a:rPr lang="en-US" sz="2800" dirty="0">
                 <a:solidFill>
                   <a:srgbClr val="14142B"/>
                 </a:solidFill>
               </a:rPr>
               <a:t>.</a:t>
             </a:r>
-            <a:endParaRPr lang="en-US" sz="2400" dirty="0"/>
+            <a:endParaRPr lang="en-US" sz="2800" dirty="0"/>
           </a:p>
         </p:txBody>
       </p:sp>
@@ -20392,7 +20725,7 @@
         <p:spPr>
           <a:xfrm>
             <a:off x="548640" y="1325880"/>
-            <a:ext cx="11064240" cy="457200"/>
+            <a:ext cx="11091672" cy="457200"/>
           </a:xfrm>
           <a:prstGeom prst="rect">
             <a:avLst/>
@@ -20430,7 +20763,7 @@
           <p:nvPr>
             <p:extLst>
               <p:ext uri="{D42A27DB-BD31-4B8C-83A1-F6EECF244321}">
-                <p14:modId xmlns:p14="http://schemas.microsoft.com/office/powerpoint/2010/main" val="2583649491"/>
+                <p14:modId xmlns:p14="http://schemas.microsoft.com/office/powerpoint/2010/main" val="354259155"/>
               </p:ext>
             </p:extLst>
           </p:nvPr>
@@ -21517,7 +21850,7 @@
         <p:spPr>
           <a:xfrm>
             <a:off x="548640" y="1325880"/>
-            <a:ext cx="6949440" cy="548640"/>
+            <a:ext cx="5669280" cy="548640"/>
           </a:xfrm>
           <a:prstGeom prst="rect">
             <a:avLst/>
@@ -21555,7 +21888,7 @@
         <p:spPr>
           <a:xfrm>
             <a:off x="548640" y="1965960"/>
-            <a:ext cx="6949440" cy="4206240"/>
+            <a:ext cx="5669280" cy="4206240"/>
           </a:xfrm>
           <a:prstGeom prst="rect">
             <a:avLst/>
@@ -21577,7 +21910,7 @@
               <a:buChar char="•"/>
             </a:pPr>
             <a:r>
-              <a:rPr lang="ko-KR" altLang="en-US" sz="2400" dirty="0">
+              <a:rPr lang="ko-KR" altLang="en-US" sz="2800" dirty="0">
                 <a:solidFill>
                   <a:srgbClr val="14142B"/>
                 </a:solidFill>
@@ -21585,17 +21918,17 @@
                 <a:ea typeface="Malgun Gothic" pitchFamily="34" charset="-122"/>
                 <a:cs typeface="Malgun Gothic" pitchFamily="34" charset="-120"/>
               </a:rPr>
-              <a:t>우리 가족은 네 명이에요</a:t>
-            </a:r>
-            <a:r>
-              <a:rPr lang="en-US" sz="2400" dirty="0">
+              <a:t>우리 가족은 네 명이에요</a:t>
+            </a:r>
+            <a:r>
+              <a:rPr lang="en-US" sz="2800" dirty="0">
                 <a:solidFill>
                   <a:srgbClr val="14142B"/>
                 </a:solidFill>
               </a:rPr>
               <a:t>.</a:t>
             </a:r>
-            <a:endParaRPr lang="en-US" sz="2400" dirty="0"/>
+            <a:endParaRPr lang="en-US" sz="2800" dirty="0"/>
           </a:p>
           <a:p>
             <a:pPr marL="228600" indent="-228600" eaLnBrk="1">
@@ -21606,7 +21939,7 @@
               <a:buChar char="•"/>
             </a:pPr>
             <a:r>
-              <a:rPr lang="ko-KR" altLang="en-US" sz="2400" dirty="0">
+              <a:rPr lang="ko-KR" altLang="en-US" sz="2800" dirty="0">
                 <a:solidFill>
                   <a:srgbClr val="14142B"/>
                 </a:solidFill>
@@ -21617,7 +21950,7 @@
               <a:t>우리 엄마예요</a:t>
             </a:r>
             <a:r>
-              <a:rPr lang="en-US" sz="2400" dirty="0">
+              <a:rPr lang="en-US" sz="2800" dirty="0">
                 <a:solidFill>
                   <a:srgbClr val="14142B"/>
                 </a:solidFill>
@@ -21625,7 +21958,7 @@
               <a:t>! · </a:t>
             </a:r>
             <a:r>
-              <a:rPr lang="ko-KR" altLang="en-US" sz="2400" dirty="0">
+              <a:rPr lang="ko-KR" altLang="en-US" sz="2800" dirty="0">
                 <a:solidFill>
                   <a:srgbClr val="14142B"/>
                 </a:solidFill>
@@ -21636,14 +21969,14 @@
               <a:t>우리 아빠예요</a:t>
             </a:r>
             <a:r>
-              <a:rPr lang="en-US" sz="2400" dirty="0">
+              <a:rPr lang="en-US" sz="2800" dirty="0">
                 <a:solidFill>
                   <a:srgbClr val="14142B"/>
                 </a:solidFill>
               </a:rPr>
               <a:t>!</a:t>
             </a:r>
-            <a:endParaRPr lang="en-US" sz="2400" dirty="0"/>
+            <a:endParaRPr lang="en-US" sz="2800" dirty="0"/>
           </a:p>
           <a:p>
             <a:pPr marL="228600" indent="-228600" eaLnBrk="1">
@@ -21654,7 +21987,7 @@
               <a:buChar char="•"/>
             </a:pPr>
             <a:r>
-              <a:rPr lang="ko-KR" altLang="en-US" sz="2400" dirty="0">
+              <a:rPr lang="ko-KR" altLang="en-US" sz="2800" dirty="0">
                 <a:solidFill>
                   <a:srgbClr val="14142B"/>
                 </a:solidFill>
@@ -21665,7 +21998,7 @@
               <a:t>이 사람은 </a:t>
             </a:r>
             <a:r>
-              <a:rPr lang="en-US" sz="2400" dirty="0">
+              <a:rPr lang="en-US" sz="2800" dirty="0">
                 <a:solidFill>
                   <a:srgbClr val="14142B"/>
                 </a:solidFill>
@@ -21673,7 +22006,7 @@
               <a:t>___</a:t>
             </a:r>
             <a:r>
-              <a:rPr lang="ko-KR" altLang="en-US" sz="2400" dirty="0">
+              <a:rPr lang="ko-KR" altLang="en-US" sz="2800" dirty="0">
                 <a:solidFill>
                   <a:srgbClr val="14142B"/>
                 </a:solidFill>
@@ -21684,7 +22017,7 @@
               <a:t>예요</a:t>
             </a:r>
             <a:r>
-              <a:rPr lang="en-US" sz="2400" dirty="0">
+              <a:rPr lang="en-US" sz="2800" dirty="0">
                 <a:solidFill>
                   <a:srgbClr val="14142B"/>
                 </a:solidFill>
@@ -21692,7 +22025,7 @@
               <a:t>/</a:t>
             </a:r>
             <a:r>
-              <a:rPr lang="ko-KR" altLang="en-US" sz="2400" dirty="0">
+              <a:rPr lang="ko-KR" altLang="en-US" sz="2800" dirty="0">
                 <a:solidFill>
                   <a:srgbClr val="14142B"/>
                 </a:solidFill>
@@ -21703,7 +22036,7 @@
               <a:t>이에요</a:t>
             </a:r>
             <a:r>
-              <a:rPr lang="en-US" sz="2400" dirty="0">
+              <a:rPr lang="en-US" sz="2800" dirty="0">
                 <a:solidFill>
                   <a:srgbClr val="14142B"/>
                 </a:solidFill>
@@ -21711,7 +22044,7 @@
               <a:t>. </a:t>
             </a:r>
             <a:r>
-              <a:rPr lang="ko-KR" altLang="en-US" sz="2400" dirty="0">
+              <a:rPr lang="ko-KR" altLang="en-US" sz="2800" dirty="0">
                 <a:solidFill>
                   <a:srgbClr val="14142B"/>
                 </a:solidFill>
@@ -21722,14 +22055,14 @@
               <a:t>친구예요</a:t>
             </a:r>
             <a:r>
-              <a:rPr lang="en-US" sz="2400" dirty="0">
+              <a:rPr lang="en-US" sz="2800" dirty="0">
                 <a:solidFill>
                   <a:srgbClr val="14142B"/>
                 </a:solidFill>
               </a:rPr>
               <a:t>.</a:t>
             </a:r>
-            <a:endParaRPr lang="en-US" sz="2400" dirty="0"/>
+            <a:endParaRPr lang="en-US" sz="2800" dirty="0"/>
           </a:p>
         </p:txBody>
       </p:sp>
@@ -21741,12 +22074,12 @@
         </p:nvSpPr>
         <p:spPr>
           <a:xfrm>
-            <a:off x="8001000" y="1417320"/>
-            <a:ext cx="3611880" cy="4480560"/>
+            <a:off x="6446520" y="1371600"/>
+            <a:ext cx="5193792" cy="4800600"/>
           </a:xfrm>
           <a:prstGeom prst="roundRect">
             <a:avLst>
-              <a:gd name="adj" fmla="val 6329"/>
+              <a:gd name="adj" fmla="val 4762"/>
             </a:avLst>
           </a:prstGeom>
           <a:solidFill>
@@ -21760,58 +22093,30 @@
           </a:ln>
         </p:spPr>
       </p:sp>
-      <p:sp>
-        <p:nvSpPr>
-          <p:cNvPr id="6" name="imagen_pendiente"/>
-          <p:cNvSpPr txBox="1"/>
-          <p:nvPr/>
-        </p:nvSpPr>
-        <p:spPr>
-          <a:xfrm>
-            <a:off x="8183880" y="1600200"/>
-            <a:ext cx="3246120" cy="4114800"/>
+      <p:pic>
+        <p:nvPicPr>
+          <p:cNvPr id="6" name="imagen" descr="C:\Users\Chingu\AppData\Local\Temp\claude\C--Users-Chingu-Desktop-ACADEMIASEULWEB\d4111e1b-5523-44ea-97b2-b1a1d9545b9e\scratchpad\decks\cache\img_946fdc4b879d62f5.png"/>
+          <p:cNvPicPr>
+            <a:picLocks noChangeAspect="1"/>
+          </p:cNvPicPr>
+          <p:nvPr/>
+        </p:nvPicPr>
+        <p:blipFill>
+          <a:blip r:embed="rId3"/>
+          <a:stretch>
+            <a:fillRect/>
+          </a:stretch>
+        </p:blipFill>
+        <p:spPr>
+          <a:xfrm>
+            <a:off x="7040833" y="1463040"/>
+            <a:ext cx="4005165" cy="4617720"/>
           </a:xfrm>
           <a:prstGeom prst="rect">
             <a:avLst/>
           </a:prstGeom>
-          <a:noFill/>
-          <a:ln/>
-        </p:spPr>
-        <p:txBody>
-          <a:bodyPr wrap="square" lIns="76200" tIns="76200" rIns="76200" bIns="76200" rtlCol="0" anchor="ctr">
-            <a:normAutofit/>
-          </a:bodyPr>
-          <a:lstStyle/>
-          <a:p>
-            <a:pPr marL="0" indent="0" algn="ctr" eaLnBrk="1">
-              <a:buNone/>
-            </a:pPr>
-            <a:r>
-              <a:rPr lang="en-US" sz="1600" b="1" dirty="0">
-                <a:solidFill>
-                  <a:srgbClr val="4236F6"/>
-                </a:solidFill>
-              </a:rPr>
-              <a:t>Imagen pendiente</a:t>
-            </a:r>
-            <a:endParaRPr lang="en-US" sz="1600" dirty="0"/>
-          </a:p>
-          <a:p>
-            <a:pPr marL="0" indent="0" algn="ctr" eaLnBrk="1">
-              <a:buNone/>
-            </a:pPr>
-            <a:r>
-              <a:rPr lang="en-US" sz="1300" dirty="0">
-                <a:solidFill>
-                  <a:srgbClr val="5C5F6B"/>
-                </a:solidFill>
-              </a:rPr>
-              <a:t>Dibujo de palitos: una familia de 4 personas con un nombre sobre cada una (nombres por definir; azul o gris)</a:t>
-            </a:r>
-            <a:endParaRPr lang="en-US" sz="1600" dirty="0"/>
-          </a:p>
-        </p:txBody>
-      </p:sp>
+        </p:spPr>
+      </p:pic>
       <p:sp>
         <p:nvSpPr>
           <p:cNvPr id="25" name="Slide Number Placeholder 0"/>
@@ -22357,7 +22662,7 @@
         <p:spPr>
           <a:xfrm>
             <a:off x="548640" y="1325880"/>
-            <a:ext cx="11064240" cy="548640"/>
+            <a:ext cx="11091672" cy="548640"/>
           </a:xfrm>
           <a:prstGeom prst="rect">
             <a:avLst/>
@@ -22476,7 +22781,7 @@
               <a:buNone/>
             </a:pPr>
             <a:r>
-              <a:rPr lang="ko-KR" altLang="en-US" sz="2400" dirty="0">
+              <a:rPr lang="ko-KR" altLang="en-US" sz="2300" dirty="0">
                 <a:solidFill>
                   <a:srgbClr val="14142B"/>
                 </a:solidFill>
@@ -22487,14 +22792,14 @@
               <a:t>___ 컵이에요</a:t>
             </a:r>
             <a:r>
-              <a:rPr lang="en-US" sz="2400" dirty="0">
+              <a:rPr lang="en-US" sz="2300" dirty="0">
                 <a:solidFill>
                   <a:srgbClr val="14142B"/>
                 </a:solidFill>
               </a:rPr>
               <a:t>? (la taza del alumno)</a:t>
             </a:r>
-            <a:endParaRPr lang="en-US" sz="2400" dirty="0"/>
+            <a:endParaRPr lang="en-US" sz="2300" dirty="0"/>
           </a:p>
         </p:txBody>
       </p:sp>
@@ -22664,7 +22969,7 @@
               <a:buNone/>
             </a:pPr>
             <a:r>
-              <a:rPr lang="ko-KR" altLang="en-US" sz="2400" dirty="0">
+              <a:rPr lang="ko-KR" altLang="en-US" sz="2300" dirty="0">
                 <a:solidFill>
                   <a:srgbClr val="14142B"/>
                 </a:solidFill>
@@ -22675,14 +22980,14 @@
               <a:t>___ 뭐예요</a:t>
             </a:r>
             <a:r>
-              <a:rPr lang="en-US" sz="2400" dirty="0">
+              <a:rPr lang="en-US" sz="2300" dirty="0">
                 <a:solidFill>
                   <a:srgbClr val="14142B"/>
                 </a:solidFill>
               </a:rPr>
               <a:t>? (el reloj de la pared)</a:t>
             </a:r>
-            <a:endParaRPr lang="en-US" sz="2400" dirty="0"/>
+            <a:endParaRPr lang="en-US" sz="2300" dirty="0"/>
           </a:p>
         </p:txBody>
       </p:sp>
@@ -23989,7 +24294,7 @@
                 <a:ea typeface="Malgun Gothic" pitchFamily="34" charset="-122"/>
                 <a:cs typeface="Malgun Gothic" pitchFamily="34" charset="-120"/>
               </a:rPr>
-              <a:t>우리 가족은 네 명이에요</a:t>
+              <a:t>우리 가족은 네 명이에요</a:t>
             </a:r>
             <a:r>
               <a:rPr lang="en-US" sz="2400" dirty="0">
@@ -24362,16 +24667,40 @@
           </a:p>
         </p:txBody>
       </p:sp>
-      <p:sp>
-        <p:nvSpPr>
-          <p:cNvPr id="3" name="panel"/>
+      <p:pic>
+        <p:nvPicPr>
+          <p:cNvPr id="3" name="imagen" descr="C:\Users\Chingu\AppData\Local\Temp\claude\C--Users-Chingu-Desktop-ACADEMIASEULWEB\d4111e1b-5523-44ea-97b2-b1a1d9545b9e\scratchpad\decks\cache\img_d33e2db89b71c50a.png"/>
+          <p:cNvPicPr>
+            <a:picLocks noChangeAspect="1"/>
+          </p:cNvPicPr>
+          <p:nvPr/>
+        </p:nvPicPr>
+        <p:blipFill>
+          <a:blip r:embed="rId3"/>
+          <a:stretch>
+            <a:fillRect/>
+          </a:stretch>
+        </p:blipFill>
+        <p:spPr>
+          <a:xfrm>
+            <a:off x="7754112" y="1508760"/>
+            <a:ext cx="3886200" cy="4480560"/>
+          </a:xfrm>
+          <a:prstGeom prst="rect">
+            <a:avLst/>
+          </a:prstGeom>
+        </p:spPr>
+      </p:pic>
+      <p:sp>
+        <p:nvSpPr>
+          <p:cNvPr id="4" name="panel"/>
           <p:cNvSpPr/>
           <p:nvPr/>
         </p:nvSpPr>
         <p:spPr>
           <a:xfrm>
-            <a:off x="1280160" y="1645920"/>
-            <a:ext cx="9628632" cy="3108960"/>
+            <a:off x="548640" y="1645920"/>
+            <a:ext cx="6931152" cy="3108960"/>
           </a:xfrm>
           <a:prstGeom prst="roundRect">
             <a:avLst>
@@ -24391,14 +24720,14 @@
       </p:sp>
       <p:sp>
         <p:nvSpPr>
-          <p:cNvPr id="4" name="frase_ko"/>
+          <p:cNvPr id="5" name="frase_ko"/>
           <p:cNvSpPr txBox="1"/>
           <p:nvPr/>
         </p:nvSpPr>
         <p:spPr>
           <a:xfrm>
-            <a:off x="1463040" y="1828800"/>
-            <a:ext cx="9262872" cy="1828800"/>
+            <a:off x="731520" y="1828800"/>
+            <a:ext cx="6565392" cy="1828800"/>
           </a:xfrm>
           <a:prstGeom prst="rect">
             <a:avLst/>
@@ -24416,7 +24745,7 @@
               <a:buNone/>
             </a:pPr>
             <a:r>
-              <a:rPr lang="ko-KR" altLang="en-US" sz="5200" b="1" dirty="0">
+              <a:rPr lang="ko-KR" altLang="en-US" sz="5700" b="1" dirty="0">
                 <a:solidFill>
                   <a:srgbClr val="4236F6"/>
                 </a:solidFill>
@@ -24424,30 +24753,47 @@
                 <a:ea typeface="Malgun Gothic" pitchFamily="34" charset="-122"/>
                 <a:cs typeface="Malgun Gothic" pitchFamily="34" charset="-120"/>
               </a:rPr>
-              <a:t>우리 가족은 다섯 명이에요</a:t>
-            </a:r>
-            <a:r>
-              <a:rPr lang="en-US" sz="5200" b="1" dirty="0">
+              <a:t>우리 가족은</a:t>
+            </a:r>
+            <a:endParaRPr lang="en-US" sz="5700" dirty="0"/>
+          </a:p>
+          <a:p>
+            <a:pPr marL="0" indent="0" algn="ctr" eaLnBrk="1">
+              <a:buNone/>
+            </a:pPr>
+            <a:r>
+              <a:rPr lang="ko-KR" altLang="en-US" sz="5700" b="1" dirty="0">
                 <a:solidFill>
                   <a:srgbClr val="4236F6"/>
                 </a:solidFill>
+                <a:latin typeface="Malgun Gothic" pitchFamily="34" charset="0"/>
+                <a:ea typeface="Malgun Gothic" pitchFamily="34" charset="-122"/>
+                <a:cs typeface="Malgun Gothic" pitchFamily="34" charset="-120"/>
+              </a:rPr>
+              <a:t>다섯 명이에요</a:t>
+            </a:r>
+            <a:r>
+              <a:rPr lang="en-US" sz="5700" b="1" dirty="0">
+                <a:solidFill>
+                  <a:srgbClr val="4236F6"/>
+                </a:solidFill>
               </a:rPr>
               <a:t>.</a:t>
             </a:r>
-            <a:endParaRPr lang="en-US" sz="5200" dirty="0"/>
+            <a:endParaRPr lang="en-US" sz="5700" dirty="0"/>
           </a:p>
         </p:txBody>
       </p:sp>
       <p:sp>
         <p:nvSpPr>
-          <p:cNvPr id="5" name="Text 3"/>
+          <p:cNvPr id="6" name="Text 3"/>
           <p:cNvSpPr txBox="1"/>
           <p:nvPr/>
         </p:nvSpPr>
         <p:spPr>
           <a:xfrm>
-            <a:off x="1463040" y="3657600"/>
-            <a:ext cx="9262872" cy="822960"/>
+            <a:off x="1051560" y="3657600"/>
+            <a:ext cx="5742432" cy="822960"/>
           </a:xfrm>
           <a:prstGeom prst="rect">
             <a:avLst/>
@@ -24478,14 +24824,14 @@
       </p:sp>
       <p:sp>
         <p:nvSpPr>
-          <p:cNvPr id="6" name="lista"/>
+          <p:cNvPr id="7" name="lista"/>
           <p:cNvSpPr txBox="1"/>
           <p:nvPr/>
         </p:nvSpPr>
         <p:spPr>
           <a:xfrm>
-            <a:off x="1280160" y="4937760"/>
-            <a:ext cx="9628632" cy="1234440"/>
+            <a:off x="548640" y="4937760"/>
+            <a:ext cx="6931152" cy="1234440"/>
           </a:xfrm>
           <a:prstGeom prst="rect">
             <a:avLst/>
@@ -24737,16 +25083,40 @@
           </a:p>
         </p:txBody>
       </p:sp>
-      <p:sp>
-        <p:nvSpPr>
-          <p:cNvPr id="3" name="Text 1"/>
+      <p:pic>
+        <p:nvPicPr>
+          <p:cNvPr id="3" name="imagen" descr="C:\Users\Chingu\AppData\Local\Temp\claude\C--Users-Chingu-Desktop-ACADEMIASEULWEB\d4111e1b-5523-44ea-97b2-b1a1d9545b9e\scratchpad\decks\cache\img_e838933691b201b3.png"/>
+          <p:cNvPicPr>
+            <a:picLocks noChangeAspect="1"/>
+          </p:cNvPicPr>
+          <p:nvPr/>
+        </p:nvPicPr>
+        <p:blipFill>
+          <a:blip r:embed="rId3"/>
+          <a:stretch>
+            <a:fillRect/>
+          </a:stretch>
+        </p:blipFill>
+        <p:spPr>
+          <a:xfrm>
+            <a:off x="7754112" y="1508760"/>
+            <a:ext cx="3886200" cy="4480560"/>
+          </a:xfrm>
+          <a:prstGeom prst="rect">
+            <a:avLst/>
+          </a:prstGeom>
+        </p:spPr>
+      </p:pic>
+      <p:sp>
+        <p:nvSpPr>
+          <p:cNvPr id="4" name="Text 1"/>
           <p:cNvSpPr txBox="1"/>
           <p:nvPr/>
         </p:nvSpPr>
         <p:spPr>
           <a:xfrm>
             <a:off x="548640" y="1325880"/>
-            <a:ext cx="11064240" cy="548640"/>
+            <a:ext cx="6931152" cy="548640"/>
           </a:xfrm>
           <a:prstGeom prst="rect">
             <a:avLst/>
@@ -24788,7 +25158,7 @@
       </p:sp>
       <p:sp>
         <p:nvSpPr>
-          <p:cNvPr id="4" name="num_0"/>
+          <p:cNvPr id="5" name="num_0"/>
           <p:cNvSpPr/>
           <p:nvPr/>
         </p:nvSpPr>
@@ -24813,7 +25183,7 @@
       </p:sp>
       <p:sp>
         <p:nvSpPr>
-          <p:cNvPr id="5" name="Text 3"/>
+          <p:cNvPr id="6" name="Text 3"/>
           <p:cNvSpPr txBox="1"/>
           <p:nvPr/>
         </p:nvSpPr>
@@ -24851,14 +25221,14 @@
       </p:sp>
       <p:sp>
         <p:nvSpPr>
-          <p:cNvPr id="6" name="Text 4"/>
+          <p:cNvPr id="7" name="Text 4"/>
           <p:cNvSpPr txBox="1"/>
           <p:nvPr/>
         </p:nvSpPr>
         <p:spPr>
           <a:xfrm>
             <a:off x="1188720" y="1965960"/>
-            <a:ext cx="6080760" cy="868680"/>
+            <a:ext cx="2735519" cy="868680"/>
           </a:xfrm>
           <a:prstGeom prst="rect">
             <a:avLst/>
@@ -24900,14 +25270,14 @@
       </p:sp>
       <p:sp>
         <p:nvSpPr>
-          <p:cNvPr id="7" name="rev_5_caja"/>
+          <p:cNvPr id="8" name="rev_5_caja"/>
           <p:cNvSpPr/>
           <p:nvPr/>
         </p:nvSpPr>
         <p:spPr>
           <a:xfrm>
-            <a:off x="7498080" y="2002536"/>
-            <a:ext cx="4142232" cy="795528"/>
+            <a:off x="4152839" y="2002536"/>
+            <a:ext cx="3326953" cy="795528"/>
           </a:xfrm>
           <a:prstGeom prst="roundRect">
             <a:avLst>
@@ -24927,14 +25297,14 @@
       </p:sp>
       <p:sp>
         <p:nvSpPr>
-          <p:cNvPr id="8" name="rev_5_txt"/>
+          <p:cNvPr id="9" name="rev_5_txt"/>
           <p:cNvSpPr txBox="1"/>
           <p:nvPr/>
         </p:nvSpPr>
         <p:spPr>
           <a:xfrm>
-            <a:off x="7589520" y="2002536"/>
-            <a:ext cx="3959352" cy="795528"/>
+            <a:off x="4244279" y="2002536"/>
+            <a:ext cx="3144073" cy="795528"/>
           </a:xfrm>
           <a:prstGeom prst="rect">
             <a:avLst/>
@@ -24976,7 +25346,7 @@
       </p:sp>
       <p:sp>
         <p:nvSpPr>
-          <p:cNvPr id="9" name="num_1"/>
+          <p:cNvPr id="10" name="num_1"/>
           <p:cNvSpPr/>
           <p:nvPr/>
         </p:nvSpPr>
@@ -25001,7 +25371,7 @@
       </p:sp>
       <p:sp>
         <p:nvSpPr>
-          <p:cNvPr id="10" name="Text 8"/>
+          <p:cNvPr id="11" name="Text 8"/>
           <p:cNvSpPr txBox="1"/>
           <p:nvPr/>
         </p:nvSpPr>
@@ -25039,14 +25409,14 @@
       </p:sp>
       <p:sp>
         <p:nvSpPr>
-          <p:cNvPr id="11" name="Text 9"/>
+          <p:cNvPr id="12" name="Text 9"/>
           <p:cNvSpPr txBox="1"/>
           <p:nvPr/>
         </p:nvSpPr>
         <p:spPr>
           <a:xfrm>
             <a:off x="1188720" y="2962656"/>
-            <a:ext cx="6080760" cy="868680"/>
+            <a:ext cx="2735519" cy="868680"/>
           </a:xfrm>
           <a:prstGeom prst="rect">
             <a:avLst/>
@@ -25088,14 +25458,14 @@
       </p:sp>
       <p:sp>
         <p:nvSpPr>
-          <p:cNvPr id="12" name="rev_6_caja"/>
+          <p:cNvPr id="13" name="rev_6_caja"/>
           <p:cNvSpPr/>
           <p:nvPr/>
         </p:nvSpPr>
         <p:spPr>
           <a:xfrm>
-            <a:off x="7498080" y="2999232"/>
-            <a:ext cx="4142232" cy="795528"/>
+            <a:off x="4152839" y="2999232"/>
+            <a:ext cx="3326953" cy="795528"/>
           </a:xfrm>
           <a:prstGeom prst="roundRect">
             <a:avLst>
@@ -25115,14 +25485,14 @@
       </p:sp>
       <p:sp>
         <p:nvSpPr>
-          <p:cNvPr id="13" name="rev_6_txt"/>
+          <p:cNvPr id="14" name="rev_6_txt"/>
           <p:cNvSpPr txBox="1"/>
           <p:nvPr/>
         </p:nvSpPr>
         <p:spPr>
           <a:xfrm>
-            <a:off x="7589520" y="2999232"/>
-            <a:ext cx="3959352" cy="795528"/>
+            <a:off x="4244279" y="2999232"/>
+            <a:ext cx="3144073" cy="795528"/>
           </a:xfrm>
           <a:prstGeom prst="rect">
             <a:avLst/>
@@ -25164,7 +25534,7 @@
       </p:sp>
       <p:sp>
         <p:nvSpPr>
-          <p:cNvPr id="14" name="num_2"/>
+          <p:cNvPr id="15" name="num_2"/>
           <p:cNvSpPr/>
           <p:nvPr/>
         </p:nvSpPr>
@@ -25189,7 +25559,7 @@
       </p:sp>
       <p:sp>
         <p:nvSpPr>
-          <p:cNvPr id="15" name="Text 13"/>
+          <p:cNvPr id="16" name="Text 13"/>
           <p:cNvSpPr txBox="1"/>
           <p:nvPr/>
         </p:nvSpPr>
@@ -25227,14 +25597,14 @@
       </p:sp>
       <p:sp>
         <p:nvSpPr>
-          <p:cNvPr id="16" name="Text 14"/>
+          <p:cNvPr id="17" name="Text 14"/>
           <p:cNvSpPr txBox="1"/>
           <p:nvPr/>
         </p:nvSpPr>
         <p:spPr>
           <a:xfrm>
             <a:off x="1188720" y="3959352"/>
-            <a:ext cx="6080760" cy="868680"/>
+            <a:ext cx="2735519" cy="868680"/>
           </a:xfrm>
           <a:prstGeom prst="rect">
             <a:avLst/>
@@ -25276,14 +25646,14 @@
       </p:sp>
       <p:sp>
         <p:nvSpPr>
-          <p:cNvPr id="17" name="rev_7_caja"/>
+          <p:cNvPr id="18" name="rev_7_caja"/>
           <p:cNvSpPr/>
           <p:nvPr/>
         </p:nvSpPr>
         <p:spPr>
           <a:xfrm>
-            <a:off x="7498080" y="3995928"/>
-            <a:ext cx="4142232" cy="795528"/>
+            <a:off x="4152839" y="3995928"/>
+            <a:ext cx="3326953" cy="795528"/>
           </a:xfrm>
           <a:prstGeom prst="roundRect">
             <a:avLst>
@@ -25303,14 +25673,14 @@
       </p:sp>
       <p:sp>
         <p:nvSpPr>
-          <p:cNvPr id="18" name="rev_7_txt"/>
+          <p:cNvPr id="19" name="rev_7_txt"/>
           <p:cNvSpPr txBox="1"/>
           <p:nvPr/>
         </p:nvSpPr>
         <p:spPr>
           <a:xfrm>
-            <a:off x="7589520" y="3995928"/>
-            <a:ext cx="3959352" cy="795528"/>
+            <a:off x="4244279" y="3995928"/>
+            <a:ext cx="3144073" cy="795528"/>
           </a:xfrm>
           <a:prstGeom prst="rect">
             <a:avLst/>
@@ -25352,7 +25722,7 @@
       </p:sp>
       <p:sp>
         <p:nvSpPr>
-          <p:cNvPr id="19" name="num_3"/>
+          <p:cNvPr id="20" name="num_3"/>
           <p:cNvSpPr/>
           <p:nvPr/>
         </p:nvSpPr>
@@ -25377,7 +25747,7 @@
       </p:sp>
       <p:sp>
         <p:nvSpPr>
-          <p:cNvPr id="20" name="Text 18"/>
+          <p:cNvPr id="21" name="Text 18"/>
           <p:cNvSpPr txBox="1"/>
           <p:nvPr/>
         </p:nvSpPr>
@@ -25415,14 +25785,14 @@
       </p:sp>
       <p:sp>
         <p:nvSpPr>
-          <p:cNvPr id="21" name="Text 19"/>
+          <p:cNvPr id="22" name="Text 19"/>
           <p:cNvSpPr txBox="1"/>
           <p:nvPr/>
         </p:nvSpPr>
         <p:spPr>
           <a:xfrm>
             <a:off x="1188720" y="4956048"/>
-            <a:ext cx="6080760" cy="868680"/>
+            <a:ext cx="2735519" cy="868680"/>
           </a:xfrm>
           <a:prstGeom prst="rect">
             <a:avLst/>
@@ -25464,14 +25834,14 @@
       </p:sp>
       <p:sp>
         <p:nvSpPr>
-          <p:cNvPr id="22" name="rev_8_caja"/>
+          <p:cNvPr id="23" name="rev_8_caja"/>
           <p:cNvSpPr/>
           <p:nvPr/>
         </p:nvSpPr>
         <p:spPr>
           <a:xfrm>
-            <a:off x="7498080" y="4992624"/>
-            <a:ext cx="4142232" cy="795528"/>
+            <a:off x="4152839" y="4992624"/>
+            <a:ext cx="3326953" cy="795528"/>
           </a:xfrm>
           <a:prstGeom prst="roundRect">
             <a:avLst>
@@ -25491,14 +25861,14 @@
       </p:sp>
       <p:sp>
         <p:nvSpPr>
-          <p:cNvPr id="23" name="rev_8_txt"/>
+          <p:cNvPr id="24" name="rev_8_txt"/>
           <p:cNvSpPr txBox="1"/>
           <p:nvPr/>
         </p:nvSpPr>
         <p:spPr>
           <a:xfrm>
-            <a:off x="7589520" y="4992624"/>
-            <a:ext cx="3959352" cy="795528"/>
+            <a:off x="4244279" y="4992624"/>
+            <a:ext cx="3144073" cy="795528"/>
           </a:xfrm>
           <a:prstGeom prst="rect">
             <a:avLst/>
@@ -25625,7 +25995,7 @@
                                           </p:stCondLst>
                                         </p:cTn>
                                         <p:tgtEl>
-                                          <p:spTgt spid="7"/>
+                                          <p:spTgt spid="8"/>
                                         </p:tgtEl>
                                         <p:attrNameLst>
                                           <p:attrName>style.visibility</p:attrName>
@@ -25652,7 +26022,7 @@
                                           </p:stCondLst>
                                         </p:cTn>
                                         <p:tgtEl>
-                                          <p:spTgt spid="8"/>
+                                          <p:spTgt spid="9"/>
                                         </p:tgtEl>
                                         <p:attrNameLst>
                                           <p:attrName>style.visibility</p:attrName>
@@ -25697,7 +26067,7 @@
                                           </p:stCondLst>
                                         </p:cTn>
                                         <p:tgtEl>
-                                          <p:spTgt spid="12"/>
+                                          <p:spTgt spid="13"/>
                                         </p:tgtEl>
                                         <p:attrNameLst>
                                           <p:attrName>style.visibility</p:attrName>
@@ -25724,7 +26094,7 @@
                                           </p:stCondLst>
                                         </p:cTn>
                                         <p:tgtEl>
-                                          <p:spTgt spid="13"/>
+                                          <p:spTgt spid="14"/>
                                         </p:tgtEl>
                                         <p:attrNameLst>
                                           <p:attrName>style.visibility</p:attrName>
@@ -25769,7 +26139,7 @@
                                           </p:stCondLst>
                                         </p:cTn>
                                         <p:tgtEl>
-                                          <p:spTgt spid="17"/>
+                                          <p:spTgt spid="18"/>
                                         </p:tgtEl>
                                         <p:attrNameLst>
                                           <p:attrName>style.visibility</p:attrName>
@@ -25796,7 +26166,7 @@
                                           </p:stCondLst>
                                         </p:cTn>
                                         <p:tgtEl>
-                                          <p:spTgt spid="18"/>
+                                          <p:spTgt spid="19"/>
                                         </p:tgtEl>
                                         <p:attrNameLst>
                                           <p:attrName>style.visibility</p:attrName>
@@ -25841,7 +26211,7 @@
                                           </p:stCondLst>
                                         </p:cTn>
                                         <p:tgtEl>
-                                          <p:spTgt spid="22"/>
+                                          <p:spTgt spid="23"/>
                                         </p:tgtEl>
                                         <p:attrNameLst>
                                           <p:attrName>style.visibility</p:attrName>
@@ -25868,7 +26238,7 @@
                                           </p:stCondLst>
                                         </p:cTn>
                                         <p:tgtEl>
-                                          <p:spTgt spid="23"/>
+                                          <p:spTgt spid="24"/>
                                         </p:tgtEl>
                                         <p:attrNameLst>
                                           <p:attrName>style.visibility</p:attrName>
@@ -25909,10 +26279,10 @@
       </p:par>
     </p:tnLst>
     <p:bldLst>
-      <p:bldP spid="8" grpId="0" animBg="1"/>
-      <p:bldP spid="13" grpId="0" animBg="1"/>
-      <p:bldP spid="18" grpId="0" animBg="1"/>
-      <p:bldP spid="23" grpId="0" animBg="1"/>
+      <p:bldP spid="9" grpId="0" animBg="1"/>
+      <p:bldP spid="14" grpId="0" animBg="1"/>
+      <p:bldP spid="19" grpId="0" animBg="1"/>
+      <p:bldP spid="24" grpId="0" animBg="1"/>
     </p:bldLst>
   </p:timing>
 </p:sld>
@@ -25995,7 +26365,7 @@
         <p:spPr>
           <a:xfrm>
             <a:off x="548640" y="1325880"/>
-            <a:ext cx="11064240" cy="457200"/>
+            <a:ext cx="11091672" cy="457200"/>
           </a:xfrm>
           <a:prstGeom prst="rect">
             <a:avLst/>
@@ -26044,7 +26414,7 @@
           <p:nvPr>
             <p:extLst>
               <p:ext uri="{D42A27DB-BD31-4B8C-83A1-F6EECF244321}">
-                <p14:modId xmlns:p14="http://schemas.microsoft.com/office/powerpoint/2010/main" val="578855251"/>
+                <p14:modId xmlns:p14="http://schemas.microsoft.com/office/powerpoint/2010/main" val="1422530055"/>
               </p:ext>
             </p:extLst>
           </p:nvPr>
@@ -27214,7 +27584,7 @@
       </p:sp>
       <p:pic>
         <p:nvPicPr>
-          <p:cNvPr id="4" name="dibujo_0" descr="C:\Users\Chingu\AppData\Local\Temp\claude\C--Users-Chingu-Desktop-ACADEMIASEULWEB\d4111e1b-5523-44ea-97b2-b1a1d9545b9e\scratchpad\decks\cache\ed95a0ec9584ebb284eca780.png"/>
+          <p:cNvPr id="4" name="dibujo_0" descr="C:\Users\Chingu\AppData\Local\Temp\claude\C--Users-Chingu-Desktop-ACADEMIASEULWEB\d4111e1b-5523-44ea-97b2-b1a1d9545b9e\scratchpad\decks\cache\img_a4e6c000af07e0ea.png"/>
           <p:cNvPicPr>
             <a:picLocks noChangeAspect="1"/>
           </p:cNvPicPr>
@@ -27228,8 +27598,8 @@
         </p:blipFill>
         <p:spPr>
           <a:xfrm>
-            <a:off x="1364513" y="1435608"/>
-            <a:ext cx="969721" cy="969721"/>
+            <a:off x="1295248" y="1435608"/>
+            <a:ext cx="1108253" cy="1108253"/>
           </a:xfrm>
           <a:prstGeom prst="rect">
             <a:avLst/>
@@ -27244,8 +27614,8 @@
         </p:nvSpPr>
         <p:spPr>
           <a:xfrm>
-            <a:off x="548640" y="2423617"/>
-            <a:ext cx="2601468" cy="507949"/>
+            <a:off x="548640" y="2562149"/>
+            <a:ext cx="2601468" cy="461772"/>
           </a:xfrm>
           <a:prstGeom prst="rect">
             <a:avLst/>
@@ -27263,7 +27633,7 @@
               <a:buNone/>
             </a:pPr>
             <a:r>
-              <a:rPr lang="ko-KR" altLang="en-US" sz="3100" b="1" dirty="0">
+              <a:rPr lang="ko-KR" altLang="en-US" sz="2900" b="1" dirty="0">
                 <a:solidFill>
                   <a:srgbClr val="4236F6"/>
                 </a:solidFill>
@@ -27273,7 +27643,7 @@
               </a:rPr>
               <a:t>할아버지</a:t>
             </a:r>
-            <a:endParaRPr lang="en-US" sz="3100" dirty="0"/>
+            <a:endParaRPr lang="en-US" sz="2900" dirty="0"/>
           </a:p>
         </p:txBody>
       </p:sp>
@@ -27285,7 +27655,7 @@
         </p:nvSpPr>
         <p:spPr>
           <a:xfrm>
-            <a:off x="548640" y="2931566"/>
+            <a:off x="548640" y="3023921"/>
             <a:ext cx="2601468" cy="274320"/>
           </a:xfrm>
           <a:prstGeom prst="rect">
@@ -27334,7 +27704,7 @@
         </p:nvSpPr>
         <p:spPr>
           <a:xfrm>
-            <a:off x="621792" y="3205886"/>
+            <a:off x="621792" y="3298241"/>
             <a:ext cx="2455164" cy="274320"/>
           </a:xfrm>
           <a:prstGeom prst="rect">
@@ -27389,8 +27759,8 @@
         </p:blipFill>
         <p:spPr>
           <a:xfrm>
-            <a:off x="2711196" y="3214116"/>
-            <a:ext cx="329184" cy="329184"/>
+            <a:off x="2747772" y="1399032"/>
+            <a:ext cx="310896" cy="310896"/>
           </a:xfrm>
           <a:prstGeom prst="rect">
             <a:avLst/>
@@ -27433,7 +27803,7 @@
       </p:sp>
       <p:pic>
         <p:nvPicPr>
-          <p:cNvPr id="10" name="dibujo_1" descr="C:\Users\Chingu\AppData\Local\Temp\claude\C--Users-Chingu-Desktop-ACADEMIASEULWEB\d4111e1b-5523-44ea-97b2-b1a1d9545b9e\scratchpad\decks\cache\ed95a0eba8b8eb8b88.png"/>
+          <p:cNvPr id="10" name="dibujo_1" descr="C:\Users\Chingu\AppData\Local\Temp\claude\C--Users-Chingu-Desktop-ACADEMIASEULWEB\d4111e1b-5523-44ea-97b2-b1a1d9545b9e\scratchpad\decks\cache\img_8f05726f2a73842b.png"/>
           <p:cNvPicPr>
             <a:picLocks noChangeAspect="1"/>
           </p:cNvPicPr>
@@ -27447,8 +27817,8 @@
         </p:blipFill>
         <p:spPr>
           <a:xfrm>
-            <a:off x="4194581" y="1435608"/>
-            <a:ext cx="969721" cy="969721"/>
+            <a:off x="4125316" y="1435608"/>
+            <a:ext cx="1108253" cy="1108253"/>
           </a:xfrm>
           <a:prstGeom prst="rect">
             <a:avLst/>
@@ -27463,8 +27833,8 @@
         </p:nvSpPr>
         <p:spPr>
           <a:xfrm>
-            <a:off x="3378708" y="2423617"/>
-            <a:ext cx="2601468" cy="507949"/>
+            <a:off x="3378708" y="2562149"/>
+            <a:ext cx="2601468" cy="461772"/>
           </a:xfrm>
           <a:prstGeom prst="rect">
             <a:avLst/>
@@ -27482,7 +27852,7 @@
               <a:buNone/>
             </a:pPr>
             <a:r>
-              <a:rPr lang="ko-KR" altLang="en-US" sz="3100" b="1" dirty="0">
+              <a:rPr lang="ko-KR" altLang="en-US" sz="2900" b="1" dirty="0">
                 <a:solidFill>
                   <a:srgbClr val="4236F6"/>
                 </a:solidFill>
@@ -27492,7 +27862,7 @@
               </a:rPr>
               <a:t>할머니</a:t>
             </a:r>
-            <a:endParaRPr lang="en-US" sz="3100" dirty="0"/>
+            <a:endParaRPr lang="en-US" sz="2900" dirty="0"/>
           </a:p>
         </p:txBody>
       </p:sp>
@@ -27504,8 +27874,8 @@
         </p:nvSpPr>
         <p:spPr>
           <a:xfrm>
-            <a:off x="3451860" y="2931566"/>
-            <a:ext cx="2455164" cy="291694"/>
+            <a:off x="3451860" y="3023921"/>
+            <a:ext cx="2455164" cy="537667"/>
           </a:xfrm>
           <a:prstGeom prst="rect">
             <a:avLst/>
@@ -27559,8 +27929,8 @@
         </p:blipFill>
         <p:spPr>
           <a:xfrm>
-            <a:off x="5541264" y="3214116"/>
-            <a:ext cx="329184" cy="329184"/>
+            <a:off x="5577840" y="1399032"/>
+            <a:ext cx="310896" cy="310896"/>
           </a:xfrm>
           <a:prstGeom prst="rect">
             <a:avLst/>
@@ -27603,7 +27973,7 @@
       </p:sp>
       <p:pic>
         <p:nvPicPr>
-          <p:cNvPr id="15" name="dibujo_2" descr="C:\Users\Chingu\AppData\Local\Temp\claude\C--Users-Chingu-Desktop-ACADEMIASEULWEB\d4111e1b-5523-44ea-97b2-b1a1d9545b9e\scratchpad\decks\cache\ec9584ebb9a0.png"/>
+          <p:cNvPr id="15" name="dibujo_2" descr="C:\Users\Chingu\AppData\Local\Temp\claude\C--Users-Chingu-Desktop-ACADEMIASEULWEB\d4111e1b-5523-44ea-97b2-b1a1d9545b9e\scratchpad\decks\cache\img_7d27bab07ebf524e.png"/>
           <p:cNvPicPr>
             <a:picLocks noChangeAspect="1"/>
           </p:cNvPicPr>
@@ -27617,8 +27987,8 @@
         </p:blipFill>
         <p:spPr>
           <a:xfrm>
-            <a:off x="7024649" y="1435608"/>
-            <a:ext cx="969721" cy="969721"/>
+            <a:off x="6955384" y="1435608"/>
+            <a:ext cx="1108253" cy="1108253"/>
           </a:xfrm>
           <a:prstGeom prst="rect">
             <a:avLst/>
@@ -27633,8 +28003,8 @@
         </p:nvSpPr>
         <p:spPr>
           <a:xfrm>
-            <a:off x="6208776" y="2423617"/>
-            <a:ext cx="2601468" cy="507949"/>
+            <a:off x="6208776" y="2562149"/>
+            <a:ext cx="2601468" cy="461772"/>
           </a:xfrm>
           <a:prstGeom prst="rect">
             <a:avLst/>
@@ -27652,7 +28022,7 @@
               <a:buNone/>
             </a:pPr>
             <a:r>
-              <a:rPr lang="ko-KR" altLang="en-US" sz="3100" b="1" dirty="0">
+              <a:rPr lang="ko-KR" altLang="en-US" sz="2900" b="1" dirty="0">
                 <a:solidFill>
                   <a:srgbClr val="4236F6"/>
                 </a:solidFill>
@@ -27662,7 +28032,7 @@
               </a:rPr>
               <a:t>아빠</a:t>
             </a:r>
-            <a:endParaRPr lang="en-US" sz="3100" dirty="0"/>
+            <a:endParaRPr lang="en-US" sz="2900" dirty="0"/>
           </a:p>
         </p:txBody>
       </p:sp>
@@ -27674,8 +28044,8 @@
         </p:nvSpPr>
         <p:spPr>
           <a:xfrm>
-            <a:off x="6281928" y="2931566"/>
-            <a:ext cx="2455164" cy="291694"/>
+            <a:off x="6281928" y="3023921"/>
+            <a:ext cx="2455164" cy="537667"/>
           </a:xfrm>
           <a:prstGeom prst="rect">
             <a:avLst/>
@@ -27729,8 +28099,8 @@
         </p:blipFill>
         <p:spPr>
           <a:xfrm>
-            <a:off x="8371332" y="3214116"/>
-            <a:ext cx="329184" cy="329184"/>
+            <a:off x="8407908" y="1399032"/>
+            <a:ext cx="310896" cy="310896"/>
           </a:xfrm>
           <a:prstGeom prst="rect">
             <a:avLst/>
@@ -27773,7 +28143,7 @@
       </p:sp>
       <p:pic>
         <p:nvPicPr>
-          <p:cNvPr id="20" name="dibujo_3" descr="C:\Users\Chingu\AppData\Local\Temp\claude\C--Users-Chingu-Desktop-ACADEMIASEULWEB\d4111e1b-5523-44ea-97b2-b1a1d9545b9e\scratchpad\decks\cache\ec9784eba788.png"/>
+          <p:cNvPr id="20" name="dibujo_3" descr="C:\Users\Chingu\AppData\Local\Temp\claude\C--Users-Chingu-Desktop-ACADEMIASEULWEB\d4111e1b-5523-44ea-97b2-b1a1d9545b9e\scratchpad\decks\cache\img_c9d26573d037ab8e.png"/>
           <p:cNvPicPr>
             <a:picLocks noChangeAspect="1"/>
           </p:cNvPicPr>
@@ -27787,8 +28157,8 @@
         </p:blipFill>
         <p:spPr>
           <a:xfrm>
-            <a:off x="9854717" y="1435608"/>
-            <a:ext cx="969721" cy="969721"/>
+            <a:off x="9785452" y="1435608"/>
+            <a:ext cx="1108253" cy="1108253"/>
           </a:xfrm>
           <a:prstGeom prst="rect">
             <a:avLst/>
@@ -27803,8 +28173,8 @@
         </p:nvSpPr>
         <p:spPr>
           <a:xfrm>
-            <a:off x="9038844" y="2423617"/>
-            <a:ext cx="2601468" cy="507949"/>
+            <a:off x="9038844" y="2562149"/>
+            <a:ext cx="2601468" cy="461772"/>
           </a:xfrm>
           <a:prstGeom prst="rect">
             <a:avLst/>
@@ -27822,7 +28192,7 @@
               <a:buNone/>
             </a:pPr>
             <a:r>
-              <a:rPr lang="ko-KR" altLang="en-US" sz="3100" b="1" dirty="0">
+              <a:rPr lang="ko-KR" altLang="en-US" sz="2900" b="1" dirty="0">
                 <a:solidFill>
                   <a:srgbClr val="4236F6"/>
                 </a:solidFill>
@@ -27832,7 +28202,7 @@
               </a:rPr>
               <a:t>엄마</a:t>
             </a:r>
-            <a:endParaRPr lang="en-US" sz="3100" dirty="0"/>
+            <a:endParaRPr lang="en-US" sz="2900" dirty="0"/>
           </a:p>
         </p:txBody>
       </p:sp>
@@ -27844,8 +28214,8 @@
         </p:nvSpPr>
         <p:spPr>
           <a:xfrm>
-            <a:off x="9111996" y="2931566"/>
-            <a:ext cx="2455164" cy="291694"/>
+            <a:off x="9111996" y="3023921"/>
+            <a:ext cx="2455164" cy="537667"/>
           </a:xfrm>
           <a:prstGeom prst="rect">
             <a:avLst/>
@@ -27899,8 +28269,8 @@
         </p:blipFill>
         <p:spPr>
           <a:xfrm>
-            <a:off x="11201400" y="3214116"/>
-            <a:ext cx="329184" cy="329184"/>
+            <a:off x="11237976" y="1399032"/>
+            <a:ext cx="310896" cy="310896"/>
           </a:xfrm>
           <a:prstGeom prst="rect">
             <a:avLst/>
@@ -27943,7 +28313,7 @@
       </p:sp>
       <p:pic>
         <p:nvPicPr>
-          <p:cNvPr id="25" name="dibujo_4" descr="C:\Users\Chingu\AppData\Local\Temp\claude\C--Users-Chingu-Desktop-ACADEMIASEULWEB\d4111e1b-5523-44ea-97b2-b1a1d9545b9e\scratchpad\decks\cache\ec98a4ebb9a0.png"/>
+          <p:cNvPr id="25" name="dibujo_4" descr="C:\Users\Chingu\AppData\Local\Temp\claude\C--Users-Chingu-Desktop-ACADEMIASEULWEB\d4111e1b-5523-44ea-97b2-b1a1d9545b9e\scratchpad\decks\cache\img_da76aea3eb8fbe3c.png"/>
           <p:cNvPicPr>
             <a:picLocks noChangeAspect="1"/>
           </p:cNvPicPr>
@@ -27957,8 +28327,8 @@
         </p:blipFill>
         <p:spPr>
           <a:xfrm>
-            <a:off x="1364513" y="3973068"/>
-            <a:ext cx="969721" cy="969721"/>
+            <a:off x="1295248" y="3973068"/>
+            <a:ext cx="1108253" cy="1108253"/>
           </a:xfrm>
           <a:prstGeom prst="rect">
             <a:avLst/>
@@ -27973,8 +28343,8 @@
         </p:nvSpPr>
         <p:spPr>
           <a:xfrm>
-            <a:off x="548640" y="4961077"/>
-            <a:ext cx="2601468" cy="507949"/>
+            <a:off x="548640" y="5099609"/>
+            <a:ext cx="2601468" cy="461772"/>
           </a:xfrm>
           <a:prstGeom prst="rect">
             <a:avLst/>
@@ -27992,7 +28362,7 @@
               <a:buNone/>
             </a:pPr>
             <a:r>
-              <a:rPr lang="ko-KR" altLang="en-US" sz="3100" b="1" dirty="0">
+              <a:rPr lang="ko-KR" altLang="en-US" sz="2900" b="1" dirty="0">
                 <a:solidFill>
                   <a:srgbClr val="4236F6"/>
                 </a:solidFill>
@@ -28002,7 +28372,7 @@
               </a:rPr>
               <a:t>오빠</a:t>
             </a:r>
-            <a:endParaRPr lang="en-US" sz="3100" dirty="0"/>
+            <a:endParaRPr lang="en-US" sz="2900" dirty="0"/>
           </a:p>
         </p:txBody>
       </p:sp>
@@ -28014,8 +28384,8 @@
         </p:nvSpPr>
         <p:spPr>
           <a:xfrm>
-            <a:off x="621792" y="5469026"/>
-            <a:ext cx="2455164" cy="291694"/>
+            <a:off x="621792" y="5561381"/>
+            <a:ext cx="2455164" cy="537667"/>
           </a:xfrm>
           <a:prstGeom prst="rect">
             <a:avLst/>
@@ -28069,8 +28439,8 @@
         </p:blipFill>
         <p:spPr>
           <a:xfrm>
-            <a:off x="2711196" y="5751576"/>
-            <a:ext cx="329184" cy="329184"/>
+            <a:off x="2747772" y="3936492"/>
+            <a:ext cx="310896" cy="310896"/>
           </a:xfrm>
           <a:prstGeom prst="rect">
             <a:avLst/>
@@ -28113,7 +28483,7 @@
       </p:sp>
       <p:pic>
         <p:nvPicPr>
-          <p:cNvPr id="30" name="dibujo_5" descr="C:\Users\Chingu\AppData\Local\Temp\claude\C--Users-Chingu-Desktop-ACADEMIASEULWEB\d4111e1b-5523-44ea-97b2-b1a1d9545b9e\scratchpad\decks\cache\ed9895.png"/>
+          <p:cNvPr id="30" name="dibujo_5" descr="C:\Users\Chingu\AppData\Local\Temp\claude\C--Users-Chingu-Desktop-ACADEMIASEULWEB\d4111e1b-5523-44ea-97b2-b1a1d9545b9e\scratchpad\decks\cache\img_f093f3ebe6f6fb0b.png"/>
           <p:cNvPicPr>
             <a:picLocks noChangeAspect="1"/>
           </p:cNvPicPr>
@@ -28127,8 +28497,8 @@
         </p:blipFill>
         <p:spPr>
           <a:xfrm>
-            <a:off x="4194581" y="3973068"/>
-            <a:ext cx="969721" cy="969721"/>
+            <a:off x="4125316" y="3973068"/>
+            <a:ext cx="1108253" cy="1108253"/>
           </a:xfrm>
           <a:prstGeom prst="rect">
             <a:avLst/>
@@ -28143,8 +28513,8 @@
         </p:nvSpPr>
         <p:spPr>
           <a:xfrm>
-            <a:off x="3378708" y="4961077"/>
-            <a:ext cx="2601468" cy="507949"/>
+            <a:off x="3378708" y="5099609"/>
+            <a:ext cx="2601468" cy="461772"/>
           </a:xfrm>
           <a:prstGeom prst="rect">
             <a:avLst/>
@@ -28162,7 +28532,7 @@
               <a:buNone/>
             </a:pPr>
             <a:r>
-              <a:rPr lang="ko-KR" altLang="en-US" sz="3100" b="1" dirty="0">
+              <a:rPr lang="ko-KR" altLang="en-US" sz="2900" b="1" dirty="0">
                 <a:solidFill>
                   <a:srgbClr val="4236F6"/>
                 </a:solidFill>
@@ -28172,7 +28542,7 @@
               </a:rPr>
               <a:t>형</a:t>
             </a:r>
-            <a:endParaRPr lang="en-US" sz="3100" dirty="0"/>
+            <a:endParaRPr lang="en-US" sz="2900" dirty="0"/>
           </a:p>
         </p:txBody>
       </p:sp>
@@ -28184,8 +28554,8 @@
         </p:nvSpPr>
         <p:spPr>
           <a:xfrm>
-            <a:off x="3451860" y="5469026"/>
-            <a:ext cx="2455164" cy="291694"/>
+            <a:off x="3451860" y="5561381"/>
+            <a:ext cx="2455164" cy="537667"/>
           </a:xfrm>
           <a:prstGeom prst="rect">
             <a:avLst/>
@@ -28239,8 +28609,8 @@
         </p:blipFill>
         <p:spPr>
           <a:xfrm>
-            <a:off x="5541264" y="5751576"/>
-            <a:ext cx="329184" cy="329184"/>
+            <a:off x="5577840" y="3936492"/>
+            <a:ext cx="310896" cy="310896"/>
           </a:xfrm>
           <a:prstGeom prst="rect">
             <a:avLst/>
@@ -28283,7 +28653,7 @@
       </p:sp>
       <p:pic>
         <p:nvPicPr>
-          <p:cNvPr id="35" name="dibujo_6" descr="C:\Users\Chingu\AppData\Local\Temp\claude\C--Users-Chingu-Desktop-ACADEMIASEULWEB\d4111e1b-5523-44ea-97b2-b1a1d9545b9e\scratchpad\decks\cache\ec96b8eb8b88.png"/>
+          <p:cNvPr id="35" name="dibujo_6" descr="C:\Users\Chingu\AppData\Local\Temp\claude\C--Users-Chingu-Desktop-ACADEMIASEULWEB\d4111e1b-5523-44ea-97b2-b1a1d9545b9e\scratchpad\decks\cache\img_caa58d17113bbb00.png"/>
           <p:cNvPicPr>
             <a:picLocks noChangeAspect="1"/>
           </p:cNvPicPr>
@@ -28297,8 +28667,8 @@
         </p:blipFill>
         <p:spPr>
           <a:xfrm>
-            <a:off x="7024649" y="3973068"/>
-            <a:ext cx="969721" cy="969721"/>
+            <a:off x="6955384" y="3973068"/>
+            <a:ext cx="1108253" cy="1108253"/>
           </a:xfrm>
           <a:prstGeom prst="rect">
             <a:avLst/>
@@ -28313,8 +28683,8 @@
         </p:nvSpPr>
         <p:spPr>
           <a:xfrm>
-            <a:off x="6208776" y="4961077"/>
-            <a:ext cx="2601468" cy="507949"/>
+            <a:off x="6208776" y="5099609"/>
+            <a:ext cx="2601468" cy="461772"/>
           </a:xfrm>
           <a:prstGeom prst="rect">
             <a:avLst/>
@@ -28332,7 +28702,7 @@
               <a:buNone/>
             </a:pPr>
             <a:r>
-              <a:rPr lang="ko-KR" altLang="en-US" sz="3100" b="1" dirty="0">
+              <a:rPr lang="ko-KR" altLang="en-US" sz="2900" b="1" dirty="0">
                 <a:solidFill>
                   <a:srgbClr val="4236F6"/>
                 </a:solidFill>
@@ -28342,7 +28712,7 @@
               </a:rPr>
               <a:t>언니</a:t>
             </a:r>
-            <a:endParaRPr lang="en-US" sz="3100" dirty="0"/>
+            <a:endParaRPr lang="en-US" sz="2900" dirty="0"/>
           </a:p>
         </p:txBody>
       </p:sp>
@@ -28354,8 +28724,8 @@
         </p:nvSpPr>
         <p:spPr>
           <a:xfrm>
-            <a:off x="6281928" y="5469026"/>
-            <a:ext cx="2455164" cy="291694"/>
+            <a:off x="6281928" y="5561381"/>
+            <a:ext cx="2455164" cy="537667"/>
           </a:xfrm>
           <a:prstGeom prst="rect">
             <a:avLst/>
@@ -28409,8 +28779,8 @@
         </p:blipFill>
         <p:spPr>
           <a:xfrm>
-            <a:off x="8371332" y="5751576"/>
-            <a:ext cx="329184" cy="329184"/>
+            <a:off x="8407908" y="3936492"/>
+            <a:ext cx="310896" cy="310896"/>
           </a:xfrm>
           <a:prstGeom prst="rect">
             <a:avLst/>
@@ -28453,7 +28823,7 @@
       </p:sp>
       <p:pic>
         <p:nvPicPr>
-          <p:cNvPr id="40" name="dibujo_7" descr="C:\Users\Chingu\AppData\Local\Temp\claude\C--Users-Chingu-Desktop-ACADEMIASEULWEB\d4111e1b-5523-44ea-97b2-b1a1d9545b9e\scratchpad\decks\cache\eb8884eb8298.png"/>
+          <p:cNvPr id="40" name="dibujo_7" descr="C:\Users\Chingu\AppData\Local\Temp\claude\C--Users-Chingu-Desktop-ACADEMIASEULWEB\d4111e1b-5523-44ea-97b2-b1a1d9545b9e\scratchpad\decks\cache\img_6fc4ecdfadb75b13.png"/>
           <p:cNvPicPr>
             <a:picLocks noChangeAspect="1"/>
           </p:cNvPicPr>
@@ -28467,8 +28837,8 @@
         </p:blipFill>
         <p:spPr>
           <a:xfrm>
-            <a:off x="9854717" y="3973068"/>
-            <a:ext cx="969721" cy="969721"/>
+            <a:off x="9785452" y="3973068"/>
+            <a:ext cx="1108253" cy="1108253"/>
           </a:xfrm>
           <a:prstGeom prst="rect">
             <a:avLst/>
@@ -28483,8 +28853,8 @@
         </p:nvSpPr>
         <p:spPr>
           <a:xfrm>
-            <a:off x="9038844" y="4961077"/>
-            <a:ext cx="2601468" cy="507949"/>
+            <a:off x="9038844" y="5099609"/>
+            <a:ext cx="2601468" cy="461772"/>
           </a:xfrm>
           <a:prstGeom prst="rect">
             <a:avLst/>
@@ -28502,7 +28872,7 @@
               <a:buNone/>
             </a:pPr>
             <a:r>
-              <a:rPr lang="ko-KR" altLang="en-US" sz="3100" b="1" dirty="0">
+              <a:rPr lang="ko-KR" altLang="en-US" sz="2900" b="1" dirty="0">
                 <a:solidFill>
                   <a:srgbClr val="4236F6"/>
                 </a:solidFill>
@@ -28512,7 +28882,7 @@
               </a:rPr>
               <a:t>누나</a:t>
             </a:r>
-            <a:endParaRPr lang="en-US" sz="3100" dirty="0"/>
+            <a:endParaRPr lang="en-US" sz="2900" dirty="0"/>
           </a:p>
         </p:txBody>
       </p:sp>
@@ -28524,8 +28894,8 @@
         </p:nvSpPr>
         <p:spPr>
           <a:xfrm>
-            <a:off x="9111996" y="5469026"/>
-            <a:ext cx="2455164" cy="291694"/>
+            <a:off x="9111996" y="5561381"/>
+            <a:ext cx="2455164" cy="537667"/>
           </a:xfrm>
           <a:prstGeom prst="rect">
             <a:avLst/>
@@ -28579,8 +28949,8 @@
         </p:blipFill>
         <p:spPr>
           <a:xfrm>
-            <a:off x="11201400" y="5751576"/>
-            <a:ext cx="329184" cy="329184"/>
+            <a:off x="11237976" y="3936492"/>
+            <a:ext cx="310896" cy="310896"/>
           </a:xfrm>
           <a:prstGeom prst="rect">
             <a:avLst/>
@@ -28769,8 +29139,8 @@
         </p:blipFill>
         <p:spPr>
           <a:xfrm>
-            <a:off x="1364513" y="1435608"/>
-            <a:ext cx="969721" cy="969721"/>
+            <a:off x="1295248" y="1435608"/>
+            <a:ext cx="1108253" cy="1108253"/>
           </a:xfrm>
           <a:prstGeom prst="rect">
             <a:avLst/>
@@ -28785,8 +29155,8 @@
         </p:nvSpPr>
         <p:spPr>
           <a:xfrm>
-            <a:off x="548640" y="2423617"/>
-            <a:ext cx="2601468" cy="507949"/>
+            <a:off x="548640" y="2562149"/>
+            <a:ext cx="2601468" cy="461772"/>
           </a:xfrm>
           <a:prstGeom prst="rect">
             <a:avLst/>
@@ -28804,7 +29174,7 @@
               <a:buNone/>
             </a:pPr>
             <a:r>
-              <a:rPr lang="ko-KR" altLang="en-US" sz="3100" b="1" dirty="0">
+              <a:rPr lang="ko-KR" altLang="en-US" sz="2900" b="1" dirty="0">
                 <a:solidFill>
                   <a:srgbClr val="4236F6"/>
                 </a:solidFill>
@@ -28814,7 +29184,7 @@
               </a:rPr>
               <a:t>가족</a:t>
             </a:r>
-            <a:endParaRPr lang="en-US" sz="3100" dirty="0"/>
+            <a:endParaRPr lang="en-US" sz="2900" dirty="0"/>
           </a:p>
         </p:txBody>
       </p:sp>
@@ -28826,8 +29196,8 @@
         </p:nvSpPr>
         <p:spPr>
           <a:xfrm>
-            <a:off x="621792" y="2931566"/>
-            <a:ext cx="2455164" cy="291694"/>
+            <a:off x="621792" y="3023921"/>
+            <a:ext cx="2455164" cy="537667"/>
           </a:xfrm>
           <a:prstGeom prst="rect">
             <a:avLst/>
@@ -28881,8 +29251,8 @@
         </p:blipFill>
         <p:spPr>
           <a:xfrm>
-            <a:off x="2711196" y="3214116"/>
-            <a:ext cx="329184" cy="329184"/>
+            <a:off x="2747772" y="1399032"/>
+            <a:ext cx="310896" cy="310896"/>
           </a:xfrm>
           <a:prstGeom prst="rect">
             <a:avLst/>
@@ -28939,8 +29309,8 @@
         </p:blipFill>
         <p:spPr>
           <a:xfrm>
-            <a:off x="4194581" y="1435608"/>
-            <a:ext cx="969721" cy="969721"/>
+            <a:off x="4125316" y="1435608"/>
+            <a:ext cx="1108253" cy="1108253"/>
           </a:xfrm>
           <a:prstGeom prst="rect">
             <a:avLst/>
@@ -28955,8 +29325,8 @@
         </p:nvSpPr>
         <p:spPr>
           <a:xfrm>
-            <a:off x="3378708" y="2423617"/>
-            <a:ext cx="2601468" cy="507949"/>
+            <a:off x="3378708" y="2562149"/>
+            <a:ext cx="2601468" cy="461772"/>
           </a:xfrm>
           <a:prstGeom prst="rect">
             <a:avLst/>
@@ -28974,7 +29344,7 @@
               <a:buNone/>
             </a:pPr>
             <a:r>
-              <a:rPr lang="ko-KR" altLang="en-US" sz="3100" b="1" dirty="0">
+              <a:rPr lang="ko-KR" altLang="en-US" sz="2900" b="1" dirty="0">
                 <a:solidFill>
                   <a:srgbClr val="4236F6"/>
                 </a:solidFill>
@@ -28984,7 +29354,7 @@
               </a:rPr>
               <a:t>동생</a:t>
             </a:r>
-            <a:endParaRPr lang="en-US" sz="3100" dirty="0"/>
+            <a:endParaRPr lang="en-US" sz="2900" dirty="0"/>
           </a:p>
         </p:txBody>
       </p:sp>
@@ -28996,8 +29366,8 @@
         </p:nvSpPr>
         <p:spPr>
           <a:xfrm>
-            <a:off x="3451860" y="2931566"/>
-            <a:ext cx="2455164" cy="291694"/>
+            <a:off x="3451860" y="3023921"/>
+            <a:ext cx="2455164" cy="537667"/>
           </a:xfrm>
           <a:prstGeom prst="rect">
             <a:avLst/>
@@ -29051,8 +29421,8 @@
         </p:blipFill>
         <p:spPr>
           <a:xfrm>
-            <a:off x="5541264" y="3214116"/>
-            <a:ext cx="329184" cy="329184"/>
+            <a:off x="5577840" y="1399032"/>
+            <a:ext cx="310896" cy="310896"/>
           </a:xfrm>
           <a:prstGeom prst="rect">
             <a:avLst/>
@@ -29109,8 +29479,8 @@
         </p:blipFill>
         <p:spPr>
           <a:xfrm>
-            <a:off x="7024649" y="1435608"/>
-            <a:ext cx="969721" cy="969721"/>
+            <a:off x="6955384" y="1435608"/>
+            <a:ext cx="1108253" cy="1108253"/>
           </a:xfrm>
           <a:prstGeom prst="rect">
             <a:avLst/>
@@ -29125,8 +29495,8 @@
         </p:nvSpPr>
         <p:spPr>
           <a:xfrm>
-            <a:off x="6208776" y="2423617"/>
-            <a:ext cx="2601468" cy="507949"/>
+            <a:off x="6208776" y="2562149"/>
+            <a:ext cx="2601468" cy="461772"/>
           </a:xfrm>
           <a:prstGeom prst="rect">
             <a:avLst/>
@@ -29144,7 +29514,7 @@
               <a:buNone/>
             </a:pPr>
             <a:r>
-              <a:rPr lang="ko-KR" altLang="en-US" sz="3100" b="1" dirty="0">
+              <a:rPr lang="ko-KR" altLang="en-US" sz="2900" b="1" dirty="0">
                 <a:solidFill>
                   <a:srgbClr val="4236F6"/>
                 </a:solidFill>
@@ -29154,7 +29524,7 @@
               </a:rPr>
               <a:t>남동생</a:t>
             </a:r>
-            <a:endParaRPr lang="en-US" sz="3100" dirty="0"/>
+            <a:endParaRPr lang="en-US" sz="2900" dirty="0"/>
           </a:p>
         </p:txBody>
       </p:sp>
@@ -29166,8 +29536,8 @@
         </p:nvSpPr>
         <p:spPr>
           <a:xfrm>
-            <a:off x="6281928" y="2931566"/>
-            <a:ext cx="2455164" cy="291694"/>
+            <a:off x="6281928" y="3023921"/>
+            <a:ext cx="2455164" cy="537667"/>
           </a:xfrm>
           <a:prstGeom prst="rect">
             <a:avLst/>
@@ -29221,8 +29591,8 @@
         </p:blipFill>
         <p:spPr>
           <a:xfrm>
-            <a:off x="8371332" y="3214116"/>
-            <a:ext cx="329184" cy="329184"/>
+            <a:off x="8407908" y="1399032"/>
+            <a:ext cx="310896" cy="310896"/>
           </a:xfrm>
           <a:prstGeom prst="rect">
             <a:avLst/>
@@ -29279,8 +29649,8 @@
         </p:blipFill>
         <p:spPr>
           <a:xfrm>
-            <a:off x="9854717" y="1435608"/>
-            <a:ext cx="969721" cy="969721"/>
+            <a:off x="9785452" y="1435608"/>
+            <a:ext cx="1108253" cy="1108253"/>
           </a:xfrm>
           <a:prstGeom prst="rect">
             <a:avLst/>
@@ -29295,8 +29665,8 @@
         </p:nvSpPr>
         <p:spPr>
           <a:xfrm>
-            <a:off x="9038844" y="2423617"/>
-            <a:ext cx="2601468" cy="507949"/>
+            <a:off x="9038844" y="2562149"/>
+            <a:ext cx="2601468" cy="461772"/>
           </a:xfrm>
           <a:prstGeom prst="rect">
             <a:avLst/>
@@ -29314,7 +29684,7 @@
               <a:buNone/>
             </a:pPr>
             <a:r>
-              <a:rPr lang="ko-KR" altLang="en-US" sz="3100" b="1" dirty="0">
+              <a:rPr lang="ko-KR" altLang="en-US" sz="2900" b="1" dirty="0">
                 <a:solidFill>
                   <a:srgbClr val="4236F6"/>
                 </a:solidFill>
@@ -29324,7 +29694,7 @@
               </a:rPr>
               <a:t>여동생</a:t>
             </a:r>
-            <a:endParaRPr lang="en-US" sz="3100" dirty="0"/>
+            <a:endParaRPr lang="en-US" sz="2900" dirty="0"/>
           </a:p>
         </p:txBody>
       </p:sp>
@@ -29336,8 +29706,8 @@
         </p:nvSpPr>
         <p:spPr>
           <a:xfrm>
-            <a:off x="9111996" y="2931566"/>
-            <a:ext cx="2455164" cy="291694"/>
+            <a:off x="9111996" y="3023921"/>
+            <a:ext cx="2455164" cy="537667"/>
           </a:xfrm>
           <a:prstGeom prst="rect">
             <a:avLst/>
@@ -29391,8 +29761,8 @@
         </p:blipFill>
         <p:spPr>
           <a:xfrm>
-            <a:off x="11201400" y="3214116"/>
-            <a:ext cx="329184" cy="329184"/>
+            <a:off x="11237976" y="1399032"/>
+            <a:ext cx="310896" cy="310896"/>
           </a:xfrm>
           <a:prstGeom prst="rect">
             <a:avLst/>
@@ -29449,8 +29819,8 @@
         </p:blipFill>
         <p:spPr>
           <a:xfrm>
-            <a:off x="1364513" y="3973068"/>
-            <a:ext cx="969721" cy="969721"/>
+            <a:off x="1295248" y="3973068"/>
+            <a:ext cx="1108253" cy="1108253"/>
           </a:xfrm>
           <a:prstGeom prst="rect">
             <a:avLst/>
@@ -29465,8 +29835,8 @@
         </p:nvSpPr>
         <p:spPr>
           <a:xfrm>
-            <a:off x="548640" y="4961077"/>
-            <a:ext cx="2601468" cy="507949"/>
+            <a:off x="548640" y="5099609"/>
+            <a:ext cx="2601468" cy="461772"/>
           </a:xfrm>
           <a:prstGeom prst="rect">
             <a:avLst/>
@@ -29484,7 +29854,7 @@
               <a:buNone/>
             </a:pPr>
             <a:r>
-              <a:rPr lang="ko-KR" altLang="en-US" sz="3100" b="1" dirty="0">
+              <a:rPr lang="ko-KR" altLang="en-US" sz="2900" b="1" dirty="0">
                 <a:solidFill>
                   <a:srgbClr val="4236F6"/>
                 </a:solidFill>
@@ -29494,7 +29864,7 @@
               </a:rPr>
               <a:t>친구</a:t>
             </a:r>
-            <a:endParaRPr lang="en-US" sz="3100" dirty="0"/>
+            <a:endParaRPr lang="en-US" sz="2900" dirty="0"/>
           </a:p>
         </p:txBody>
       </p:sp>
@@ -29506,8 +29876,8 @@
         </p:nvSpPr>
         <p:spPr>
           <a:xfrm>
-            <a:off x="621792" y="5469026"/>
-            <a:ext cx="2455164" cy="291694"/>
+            <a:off x="621792" y="5561381"/>
+            <a:ext cx="2455164" cy="537667"/>
           </a:xfrm>
           <a:prstGeom prst="rect">
             <a:avLst/>
@@ -29561,8 +29931,8 @@
         </p:blipFill>
         <p:spPr>
           <a:xfrm>
-            <a:off x="2711196" y="5751576"/>
-            <a:ext cx="329184" cy="329184"/>
+            <a:off x="2747772" y="3936492"/>
+            <a:ext cx="310896" cy="310896"/>
           </a:xfrm>
           <a:prstGeom prst="rect">
             <a:avLst/>
@@ -29619,8 +29989,8 @@
         </p:blipFill>
         <p:spPr>
           <a:xfrm>
-            <a:off x="4194581" y="3973068"/>
-            <a:ext cx="969721" cy="969721"/>
+            <a:off x="4125316" y="3973068"/>
+            <a:ext cx="1108253" cy="1108253"/>
           </a:xfrm>
           <a:prstGeom prst="rect">
             <a:avLst/>
@@ -29635,8 +30005,8 @@
         </p:nvSpPr>
         <p:spPr>
           <a:xfrm>
-            <a:off x="3378708" y="4961077"/>
-            <a:ext cx="2601468" cy="507949"/>
+            <a:off x="3378708" y="5099609"/>
+            <a:ext cx="2601468" cy="461772"/>
           </a:xfrm>
           <a:prstGeom prst="rect">
             <a:avLst/>
@@ -29654,7 +30024,7 @@
               <a:buNone/>
             </a:pPr>
             <a:r>
-              <a:rPr lang="ko-KR" altLang="en-US" sz="3100" b="1" dirty="0">
+              <a:rPr lang="ko-KR" altLang="en-US" sz="2900" b="1" dirty="0">
                 <a:solidFill>
                   <a:srgbClr val="4236F6"/>
                 </a:solidFill>
@@ -29664,7 +30034,7 @@
               </a:rPr>
               <a:t>강아지</a:t>
             </a:r>
-            <a:endParaRPr lang="en-US" sz="3100" dirty="0"/>
+            <a:endParaRPr lang="en-US" sz="2900" dirty="0"/>
           </a:p>
         </p:txBody>
       </p:sp>
@@ -29676,8 +30046,8 @@
         </p:nvSpPr>
         <p:spPr>
           <a:xfrm>
-            <a:off x="3451860" y="5469026"/>
-            <a:ext cx="2455164" cy="291694"/>
+            <a:off x="3451860" y="5561381"/>
+            <a:ext cx="2455164" cy="537667"/>
           </a:xfrm>
           <a:prstGeom prst="rect">
             <a:avLst/>
@@ -29731,8 +30101,8 @@
         </p:blipFill>
         <p:spPr>
           <a:xfrm>
-            <a:off x="5541264" y="5751576"/>
-            <a:ext cx="329184" cy="329184"/>
+            <a:off x="5577840" y="3936492"/>
+            <a:ext cx="310896" cy="310896"/>
           </a:xfrm>
           <a:prstGeom prst="rect">
             <a:avLst/>
@@ -29789,8 +30159,8 @@
         </p:blipFill>
         <p:spPr>
           <a:xfrm>
-            <a:off x="7024649" y="3973068"/>
-            <a:ext cx="969721" cy="969721"/>
+            <a:off x="6955384" y="3973068"/>
+            <a:ext cx="1108253" cy="1108253"/>
           </a:xfrm>
           <a:prstGeom prst="rect">
             <a:avLst/>
@@ -29805,8 +30175,8 @@
         </p:nvSpPr>
         <p:spPr>
           <a:xfrm>
-            <a:off x="6208776" y="4961077"/>
-            <a:ext cx="2601468" cy="507949"/>
+            <a:off x="6208776" y="5099609"/>
+            <a:ext cx="2601468" cy="461772"/>
           </a:xfrm>
           <a:prstGeom prst="rect">
             <a:avLst/>
@@ -29824,7 +30194,7 @@
               <a:buNone/>
             </a:pPr>
             <a:r>
-              <a:rPr lang="ko-KR" altLang="en-US" sz="3100" b="1" dirty="0">
+              <a:rPr lang="ko-KR" altLang="en-US" sz="2900" b="1" dirty="0">
                 <a:solidFill>
                   <a:srgbClr val="4236F6"/>
                 </a:solidFill>
@@ -29834,7 +30204,7 @@
               </a:rPr>
               <a:t>고양이</a:t>
             </a:r>
-            <a:endParaRPr lang="en-US" sz="3100" dirty="0"/>
+            <a:endParaRPr lang="en-US" sz="2900" dirty="0"/>
           </a:p>
         </p:txBody>
       </p:sp>
@@ -29846,8 +30216,8 @@
         </p:nvSpPr>
         <p:spPr>
           <a:xfrm>
-            <a:off x="6281928" y="5469026"/>
-            <a:ext cx="2455164" cy="291694"/>
+            <a:off x="6281928" y="5561381"/>
+            <a:ext cx="2455164" cy="537667"/>
           </a:xfrm>
           <a:prstGeom prst="rect">
             <a:avLst/>
@@ -29901,8 +30271,8 @@
         </p:blipFill>
         <p:spPr>
           <a:xfrm>
-            <a:off x="8371332" y="5751576"/>
-            <a:ext cx="329184" cy="329184"/>
+            <a:off x="8407908" y="3936492"/>
+            <a:ext cx="310896" cy="310896"/>
           </a:xfrm>
           <a:prstGeom prst="rect">
             <a:avLst/>

--- a/Curriculo/Fase2_Basico1/decks/Basico1_S04_Kiran.pptx
+++ b/Curriculo/Fase2_Basico1/decks/Basico1_S04_Kiran.pptx
@@ -133,7 +133,7 @@
   <p:extLst>
     <p:ext uri="{521415D9-36F7-43E2-AB2F-B90AF26B5E84}">
       <p14:sectionLst xmlns:p14="http://schemas.microsoft.com/office/powerpoint/2010/main">
-        <p14:section name="Semana 4" id="{1467274C-BA5A-E3D5-B9A9-FE5FE09B493E}">
+        <p14:section name="Semana 4" id="{195217CF-FF05-DF61-6167-B8D3AA112C73}">
           <p14:sldIdLst>
             <p14:sldId id="256"/>
             <p14:sldId id="257"/>
@@ -198,7 +198,7 @@
     </p:spTree>
     <p:extLst>
       <p:ext uri="{BB962C8B-B14F-4D97-AF65-F5344CB8AC3E}">
-        <p14:creationId xmlns:p14="http://schemas.microsoft.com/office/powerpoint/2010/main" val="3343387157"/>
+        <p14:creationId xmlns:p14="http://schemas.microsoft.com/office/powerpoint/2010/main" val="180281189"/>
       </p:ext>
     </p:extLst>
   </p:cSld>
@@ -344,7 +344,7 @@
           <a:p>
             <a:r>
               <a:rPr lang="en-US" dirty="0"/>
-              <a:t>20:00–20:01. Graba desde el minuto 0 (Basico1-Martes_S04_2026-11-03 / Basico1-Jueves_S04_2026-11-05) y comparte la pantalla. Saluda: «안녕하세요!» Recuerda que en EE.UU. cambió la hora el domingo 1 de noviembre (EE.UU. Este: 18:00). «¡Bienvenidos a la semana 4: estamos en la mitad del curso!»
+              <a:t>20:00–20:01. Graba desde el minuto 0 (Basico1-Martes_S04_2026-11-10 / Basico1-Jueves_S04_2026-11-12) y comparte la pantalla. Saluda: «안녕하세요!» «¡Bienvenidos a la semana 4: estamos en la mitad del curso!»
 Fuente: S04 C.15 L1 · B 20:00 · C.2 · C.3 Bloque 0
 Lámina 1</a:t>
             </a:r>
@@ -1682,7 +1682,7 @@
           <a:p>
             <a:r>
               <a:rPr lang="en-US" dirty="0"/>
-              <a:t>20:56–20:58, 1,5 min. Las 3 partes de la tarea; la tarjeta de lectura de control («estas 5 palabras las leen al inicio del audio, antes de presentar a su familia»); y qué reciben de mitad de curso: la guía de estudio en el grupo y tu comentario de 3 líneas por privado. Diles el día acordado [propuesta: domingo 8 de noviembre; confirmar con Kiran]; si Jay eligió la salida (b): «si me mandan el audio antes del sábado 7 a las 20:00, lo incluyo en su comentario». «La clase 5 abre con el Quiz 4: números y familia.» En el Lector, la romanización bajo los números se tapa con el dedo.
+              <a:t>20:56–20:58, 1,5 min. Las 3 partes de la tarea; la tarjeta de lectura de control («estas 5 palabras las leen al inicio del audio, antes de presentar a su familia»); y qué reciben de mitad de curso: la guía de estudio en el grupo y tu comentario de 3 líneas por privado. Diles el día acordado [propuesta: domingo 15 de noviembre; confirmar con Kiran]; si Jay eligió la salida (b): «si me mandan el audio antes del sábado 14 a las 20:00, lo incluyo en su comentario». «La clase 5 abre con el Quiz 4: números y familia.» En el Lector, la romanización bajo los números se tapa con el dedo.
 Fuente: S04 C.15 L22 · A campos 13, 14 y 17 · C.3 Cierre · C.13 · Material del alumno §9
 Lámina 22</a:t>
             </a:r>
@@ -3779,7 +3779,7 @@
                   <a:srgbClr val="E8B84B"/>
                 </a:solidFill>
               </a:rPr>
-              <a:t>) · mar 3 / jue 5 nov</a:t>
+              <a:t>) · mar 10 / jue 12 nov</a:t>
             </a:r>
             <a:endParaRPr lang="en-US" sz="2200" dirty="0"/>
           </a:p>
@@ -3905,7 +3905,7 @@
           <p:nvPr>
             <p:extLst>
               <p:ext uri="{D42A27DB-BD31-4B8C-83A1-F6EECF244321}">
-                <p14:modId xmlns:p14="http://schemas.microsoft.com/office/powerpoint/2010/main" val="1760797175"/>
+                <p14:modId xmlns:p14="http://schemas.microsoft.com/office/powerpoint/2010/main" val="1575558262"/>
               </p:ext>
             </p:extLst>
           </p:nvPr>
@@ -10210,7 +10210,7 @@
         </p:nvSpPr>
         <p:spPr>
           <a:xfrm>
-            <a:off x="548640" y="4137660"/>
+            <a:off x="2165822" y="4137660"/>
             <a:ext cx="1388582" cy="2034540"/>
           </a:xfrm>
           <a:prstGeom prst="roundRect">
@@ -10237,7 +10237,7 @@
         </p:nvSpPr>
         <p:spPr>
           <a:xfrm>
-            <a:off x="548640" y="4210812"/>
+            <a:off x="2165822" y="4210812"/>
             <a:ext cx="1388582" cy="1261415"/>
           </a:xfrm>
           <a:prstGeom prst="rect">
@@ -10278,7 +10278,7 @@
         </p:nvSpPr>
         <p:spPr>
           <a:xfrm>
-            <a:off x="594360" y="5439766"/>
+            <a:off x="2211542" y="5439766"/>
             <a:ext cx="1297142" cy="695858"/>
           </a:xfrm>
           <a:prstGeom prst="rect">
@@ -10316,7 +10316,7 @@
         </p:nvSpPr>
         <p:spPr>
           <a:xfrm>
-            <a:off x="2165822" y="4137660"/>
+            <a:off x="3783003" y="4137660"/>
             <a:ext cx="1388582" cy="2034540"/>
           </a:xfrm>
           <a:prstGeom prst="roundRect">
@@ -10343,7 +10343,7 @@
         </p:nvSpPr>
         <p:spPr>
           <a:xfrm>
-            <a:off x="2165822" y="4210812"/>
+            <a:off x="3783003" y="4210812"/>
             <a:ext cx="1388582" cy="1261415"/>
           </a:xfrm>
           <a:prstGeom prst="rect">
@@ -10384,7 +10384,7 @@
         </p:nvSpPr>
         <p:spPr>
           <a:xfrm>
-            <a:off x="2211542" y="5439766"/>
+            <a:off x="3828723" y="5439766"/>
             <a:ext cx="1297142" cy="695858"/>
           </a:xfrm>
           <a:prstGeom prst="rect">
@@ -10422,7 +10422,7 @@
         </p:nvSpPr>
         <p:spPr>
           <a:xfrm>
-            <a:off x="3783003" y="4137660"/>
+            <a:off x="5400185" y="4137660"/>
             <a:ext cx="1388582" cy="2034540"/>
           </a:xfrm>
           <a:prstGeom prst="roundRect">
@@ -10449,7 +10449,7 @@
         </p:nvSpPr>
         <p:spPr>
           <a:xfrm>
-            <a:off x="3783003" y="4210812"/>
+            <a:off x="5400185" y="4210812"/>
             <a:ext cx="1388582" cy="1261415"/>
           </a:xfrm>
           <a:prstGeom prst="rect">
@@ -10490,7 +10490,7 @@
         </p:nvSpPr>
         <p:spPr>
           <a:xfrm>
-            <a:off x="3828723" y="5439766"/>
+            <a:off x="5445905" y="5439766"/>
             <a:ext cx="1297142" cy="695858"/>
           </a:xfrm>
           <a:prstGeom prst="rect">
@@ -10528,7 +10528,7 @@
         </p:nvSpPr>
         <p:spPr>
           <a:xfrm>
-            <a:off x="5400185" y="4137660"/>
+            <a:off x="7017367" y="4137660"/>
             <a:ext cx="1388582" cy="2034540"/>
           </a:xfrm>
           <a:prstGeom prst="roundRect">
@@ -10555,7 +10555,7 @@
         </p:nvSpPr>
         <p:spPr>
           <a:xfrm>
-            <a:off x="5400185" y="4210812"/>
+            <a:off x="7017367" y="4210812"/>
             <a:ext cx="1388582" cy="1261415"/>
           </a:xfrm>
           <a:prstGeom prst="rect">
@@ -10596,7 +10596,7 @@
         </p:nvSpPr>
         <p:spPr>
           <a:xfrm>
-            <a:off x="5445905" y="5439766"/>
+            <a:off x="7063087" y="5439766"/>
             <a:ext cx="1297142" cy="695858"/>
           </a:xfrm>
           <a:prstGeom prst="rect">
@@ -10634,7 +10634,7 @@
         </p:nvSpPr>
         <p:spPr>
           <a:xfrm>
-            <a:off x="7017367" y="4137660"/>
+            <a:off x="8634549" y="4137660"/>
             <a:ext cx="1388582" cy="2034540"/>
           </a:xfrm>
           <a:prstGeom prst="roundRect">
@@ -10661,7 +10661,7 @@
         </p:nvSpPr>
         <p:spPr>
           <a:xfrm>
-            <a:off x="7017367" y="4210812"/>
+            <a:off x="8634549" y="4210812"/>
             <a:ext cx="1388582" cy="1261415"/>
           </a:xfrm>
           <a:prstGeom prst="rect">
@@ -10702,7 +10702,7 @@
         </p:nvSpPr>
         <p:spPr>
           <a:xfrm>
-            <a:off x="7063087" y="5439766"/>
+            <a:off x="8680269" y="5439766"/>
             <a:ext cx="1297142" cy="695858"/>
           </a:xfrm>
           <a:prstGeom prst="rect">
@@ -10987,7 +10987,7 @@
           <p:nvPr>
             <p:extLst>
               <p:ext uri="{D42A27DB-BD31-4B8C-83A1-F6EECF244321}">
-                <p14:modId xmlns:p14="http://schemas.microsoft.com/office/powerpoint/2010/main" val="975104975"/>
+                <p14:modId xmlns:p14="http://schemas.microsoft.com/office/powerpoint/2010/main" val="2457690411"/>
               </p:ext>
             </p:extLst>
           </p:nvPr>
@@ -12989,7 +12989,7 @@
           <p:nvPr>
             <p:extLst>
               <p:ext uri="{D42A27DB-BD31-4B8C-83A1-F6EECF244321}">
-                <p14:modId xmlns:p14="http://schemas.microsoft.com/office/powerpoint/2010/main" val="861660501"/>
+                <p14:modId xmlns:p14="http://schemas.microsoft.com/office/powerpoint/2010/main" val="83953531"/>
               </p:ext>
             </p:extLst>
           </p:nvPr>
@@ -14997,7 +14997,7 @@
           <p:nvPr>
             <p:extLst>
               <p:ext uri="{D42A27DB-BD31-4B8C-83A1-F6EECF244321}">
-                <p14:modId xmlns:p14="http://schemas.microsoft.com/office/powerpoint/2010/main" val="241210756"/>
+                <p14:modId xmlns:p14="http://schemas.microsoft.com/office/powerpoint/2010/main" val="802731274"/>
               </p:ext>
             </p:extLst>
           </p:nvPr>
@@ -20086,7 +20086,7 @@
                   <a:srgbClr val="4236F6"/>
                 </a:solidFill>
               </a:rPr>
-              <a:t>Entrega antes de la clase 5: mar 10 / jue 12 nov, 20:00 (hora de Chile)</a:t>
+              <a:t>Entrega antes de la clase 5: mar 17 / jue 19 nov, 20:00 (hora de Chile)</a:t>
             </a:r>
             <a:endParaRPr lang="en-US" sz="1800" dirty="0"/>
           </a:p>
@@ -20763,7 +20763,7 @@
           <p:nvPr>
             <p:extLst>
               <p:ext uri="{D42A27DB-BD31-4B8C-83A1-F6EECF244321}">
-                <p14:modId xmlns:p14="http://schemas.microsoft.com/office/powerpoint/2010/main" val="354259155"/>
+                <p14:modId xmlns:p14="http://schemas.microsoft.com/office/powerpoint/2010/main" val="3617821242"/>
               </p:ext>
             </p:extLst>
           </p:nvPr>
@@ -26414,7 +26414,7 @@
           <p:nvPr>
             <p:extLst>
               <p:ext uri="{D42A27DB-BD31-4B8C-83A1-F6EECF244321}">
-                <p14:modId xmlns:p14="http://schemas.microsoft.com/office/powerpoint/2010/main" val="1422530055"/>
+                <p14:modId xmlns:p14="http://schemas.microsoft.com/office/powerpoint/2010/main" val="3299665851"/>
               </p:ext>
             </p:extLst>
           </p:nvPr>
@@ -29777,7 +29777,7 @@
         </p:nvSpPr>
         <p:spPr>
           <a:xfrm>
-            <a:off x="548640" y="3863340"/>
+            <a:off x="1963674" y="3863340"/>
             <a:ext cx="2601468" cy="2308860"/>
           </a:xfrm>
           <a:prstGeom prst="roundRect">
@@ -29819,7 +29819,7 @@
         </p:blipFill>
         <p:spPr>
           <a:xfrm>
-            <a:off x="1295248" y="3973068"/>
+            <a:off x="2710282" y="3973068"/>
             <a:ext cx="1108253" cy="1108253"/>
           </a:xfrm>
           <a:prstGeom prst="rect">
@@ -29835,7 +29835,7 @@
         </p:nvSpPr>
         <p:spPr>
           <a:xfrm>
-            <a:off x="548640" y="5099609"/>
+            <a:off x="1963674" y="5099609"/>
             <a:ext cx="2601468" cy="461772"/>
           </a:xfrm>
           <a:prstGeom prst="rect">
@@ -29876,7 +29876,7 @@
         </p:nvSpPr>
         <p:spPr>
           <a:xfrm>
-            <a:off x="621792" y="5561381"/>
+            <a:off x="2036826" y="5561381"/>
             <a:ext cx="2455164" cy="537667"/>
           </a:xfrm>
           <a:prstGeom prst="rect">
@@ -29931,7 +29931,7 @@
         </p:blipFill>
         <p:spPr>
           <a:xfrm>
-            <a:off x="2747772" y="3936492"/>
+            <a:off x="4162806" y="3936492"/>
             <a:ext cx="310896" cy="310896"/>
           </a:xfrm>
           <a:prstGeom prst="rect">
@@ -29947,7 +29947,7 @@
         </p:nvSpPr>
         <p:spPr>
           <a:xfrm>
-            <a:off x="3378708" y="3863340"/>
+            <a:off x="4793742" y="3863340"/>
             <a:ext cx="2601468" cy="2308860"/>
           </a:xfrm>
           <a:prstGeom prst="roundRect">
@@ -29989,7 +29989,7 @@
         </p:blipFill>
         <p:spPr>
           <a:xfrm>
-            <a:off x="4125316" y="3973068"/>
+            <a:off x="5540350" y="3973068"/>
             <a:ext cx="1108253" cy="1108253"/>
           </a:xfrm>
           <a:prstGeom prst="rect">
@@ -30005,7 +30005,7 @@
         </p:nvSpPr>
         <p:spPr>
           <a:xfrm>
-            <a:off x="3378708" y="5099609"/>
+            <a:off x="4793742" y="5099609"/>
             <a:ext cx="2601468" cy="461772"/>
           </a:xfrm>
           <a:prstGeom prst="rect">
@@ -30046,7 +30046,7 @@
         </p:nvSpPr>
         <p:spPr>
           <a:xfrm>
-            <a:off x="3451860" y="5561381"/>
+            <a:off x="4866894" y="5561381"/>
             <a:ext cx="2455164" cy="537667"/>
           </a:xfrm>
           <a:prstGeom prst="rect">
@@ -30101,7 +30101,7 @@
         </p:blipFill>
         <p:spPr>
           <a:xfrm>
-            <a:off x="5577840" y="3936492"/>
+            <a:off x="6992874" y="3936492"/>
             <a:ext cx="310896" cy="310896"/>
           </a:xfrm>
           <a:prstGeom prst="rect">
@@ -30117,7 +30117,7 @@
         </p:nvSpPr>
         <p:spPr>
           <a:xfrm>
-            <a:off x="6208776" y="3863340"/>
+            <a:off x="7623810" y="3863340"/>
             <a:ext cx="2601468" cy="2308860"/>
           </a:xfrm>
           <a:prstGeom prst="roundRect">
@@ -30159,7 +30159,7 @@
         </p:blipFill>
         <p:spPr>
           <a:xfrm>
-            <a:off x="6955384" y="3973068"/>
+            <a:off x="8370418" y="3973068"/>
             <a:ext cx="1108253" cy="1108253"/>
           </a:xfrm>
           <a:prstGeom prst="rect">
@@ -30175,7 +30175,7 @@
         </p:nvSpPr>
         <p:spPr>
           <a:xfrm>
-            <a:off x="6208776" y="5099609"/>
+            <a:off x="7623810" y="5099609"/>
             <a:ext cx="2601468" cy="461772"/>
           </a:xfrm>
           <a:prstGeom prst="rect">
@@ -30216,7 +30216,7 @@
         </p:nvSpPr>
         <p:spPr>
           <a:xfrm>
-            <a:off x="6281928" y="5561381"/>
+            <a:off x="7696962" y="5561381"/>
             <a:ext cx="2455164" cy="537667"/>
           </a:xfrm>
           <a:prstGeom prst="rect">
@@ -30271,7 +30271,7 @@
         </p:blipFill>
         <p:spPr>
           <a:xfrm>
-            <a:off x="8407908" y="3936492"/>
+            <a:off x="9822942" y="3936492"/>
             <a:ext cx="310896" cy="310896"/>
           </a:xfrm>
           <a:prstGeom prst="rect">
